--- a/docs/meetings/20260816/CLS別府第2回企画立案.pptx
+++ b/docs/meetings/20260816/CLS別府第2回企画立案.pptx
@@ -21,6 +21,7 @@
     <p:sldId id="269" r:id="rId15"/>
     <p:sldId id="270" r:id="rId16"/>
     <p:sldId id="271" r:id="rId17"/>
+    <p:sldId id="274" r:id="rId25"/>
     <p:sldId id="272" r:id="rId18"/>
     <p:sldId id="273" r:id="rId19"/>
   </p:sldIdLst>
@@ -1346,6 +1347,76 @@
         <p14:creationId xmlns:p14="http://schemas.microsoft.com/office/powerpoint/2010/main" val="1024086991"/>
       </p:ext>
     </p:extLst>
+  </p:cSld>
+  <p:clrMapOvr>
+    <a:masterClrMapping/>
+  </p:clrMapOvr>
+</p:notes>
+</file>
+
+<file path=ppt/notesSlides/notesSlide19.xml><?xml version="1.0" encoding="utf-8"?>
+<p:notes xmlns:a="http://schemas.openxmlformats.org/drawingml/2006/main" xmlns:p="http://schemas.openxmlformats.org/presentationml/2006/main" xmlns:r="http://schemas.openxmlformats.org/officeDocument/2006/relationships">
+  <p:cSld>
+    <p:spTree>
+      <p:nvGrpSpPr>
+        <p:cNvPr id="1" name=""/>
+        <p:cNvGrpSpPr/>
+        <p:nvPr/>
+      </p:nvGrpSpPr>
+      <p:grpSpPr>
+        <a:xfrm>
+          <a:off x="0" y="0"/>
+          <a:ext cx="0" cy="0"/>
+          <a:chOff x="0" y="0"/>
+          <a:chExt cx="0" cy="0"/>
+        </a:xfrm>
+      </p:grpSpPr>
+      <p:sp>
+        <p:nvSpPr>
+          <p:cNvPr id="2" name="Slide Image Placeholder 1"/>
+          <p:cNvSpPr>
+            <a:spLocks noGrp="1"/>
+          </p:cNvSpPr>
+          <p:nvPr>
+            <p:ph type="sldImg" idx="2"/>
+          </p:nvPr>
+        </p:nvSpPr>
+        <p:spPr/>
+      </p:sp>
+      <p:sp>
+        <p:nvSpPr>
+          <p:cNvPr id="3" name="Notes Placeholder 2"/>
+          <p:cNvSpPr>
+            <a:spLocks noGrp="1"/>
+          </p:cNvSpPr>
+          <p:nvPr>
+            <p:ph type="body" idx="3" sz="quarter"/>
+          </p:nvPr>
+        </p:nvSpPr>
+        <p:spPr/>
+        <p:txBody>
+          <a:bodyPr/>
+          <a:lstStyle/>
+          <a:p>
+            <a:r>
+              <a:t>集客は本編の告知から始まるのではなく、プレヒートイベントと出稽古から始まる。「名指しの巻き込み」は運営3名それぞれが誰に声をかけるかまで、この場で洗い出す。</a:t>
+            </a:r>
+          </a:p>
+        </p:txBody>
+      </p:sp>
+      <p:sp>
+        <p:nvSpPr>
+          <p:cNvPr id="4" name="Slide Number Placeholder 3"/>
+          <p:cNvSpPr>
+            <a:spLocks noGrp="1"/>
+          </p:cNvSpPr>
+          <p:nvPr>
+            <p:ph type="sldNum" idx="5" sz="quarter"/>
+          </p:nvPr>
+        </p:nvSpPr>
+        <p:spPr/>
+      </p:sp>
+    </p:spTree>
   </p:cSld>
   <p:clrMapOvr>
     <a:masterClrMapping/>
@@ -7716,6 +7787,10 @@
             <a:prstDash val="solid"/>
           </a:ln>
         </p:spPr>
+        <p:txBody>
+          <a:bodyPr/>
+          <a:p/>
+        </p:txBody>
       </p:sp>
       <p:sp>
         <p:nvSpPr>
@@ -7821,6 +7896,10 @@
             <a:prstDash val="solid"/>
           </a:ln>
         </p:spPr>
+        <p:txBody>
+          <a:bodyPr/>
+          <a:p/>
+        </p:txBody>
       </p:sp>
       <p:sp>
         <p:nvSpPr>
@@ -7926,6 +8005,10 @@
             <a:prstDash val="solid"/>
           </a:ln>
         </p:spPr>
+        <p:txBody>
+          <a:bodyPr/>
+          <a:p/>
+        </p:txBody>
       </p:sp>
       <p:sp>
         <p:nvSpPr>
@@ -8119,7 +8202,7 @@
                 <a:ea typeface="Meiryo" pitchFamily="34" charset="-122"/>
                 <a:cs typeface="Meiryo" pitchFamily="34" charset="-120"/>
               </a:rPr>
-              <a:t>17</a:t>
+              <a:t>18</a:t>
             </a:r>
             <a:endParaRPr lang="en-US" sz="1000" dirty="0"/>
           </a:p>
@@ -9321,7 +9404,910 @@
                 <a:ea typeface="Meiryo" pitchFamily="34" charset="-122"/>
                 <a:cs typeface="Meiryo" pitchFamily="34" charset="-120"/>
               </a:rPr>
-              <a:t>18</a:t>
+              <a:t>19</a:t>
+            </a:r>
+            <a:endParaRPr lang="en-US" sz="1000" dirty="0"/>
+          </a:p>
+        </p:txBody>
+      </p:sp>
+    </p:spTree>
+  </p:cSld>
+  <p:clrMapOvr>
+    <a:masterClrMapping/>
+  </p:clrMapOvr>
+</p:sld>
+</file>
+
+<file path=ppt/slides/slide19.xml><?xml version="1.0" encoding="utf-8"?>
+<p:sld xmlns:a="http://schemas.openxmlformats.org/drawingml/2006/main" xmlns:p="http://schemas.openxmlformats.org/presentationml/2006/main" xmlns:r="http://schemas.openxmlformats.org/officeDocument/2006/relationships">
+  <p:cSld>
+    <p:spTree>
+      <p:nvGrpSpPr>
+        <p:cNvPr id="1" name=""/>
+        <p:cNvGrpSpPr/>
+        <p:nvPr/>
+      </p:nvGrpSpPr>
+      <p:grpSpPr/>
+      <p:sp>
+        <p:nvSpPr>
+          <p:cNvPr id="2" name="Text 0"/>
+          <p:cNvSpPr/>
+          <p:nvPr/>
+        </p:nvSpPr>
+        <p:spPr>
+          <a:xfrm>
+            <a:off x="640080" y="201168"/>
+            <a:ext cx="10881360" cy="274320"/>
+          </a:xfrm>
+          <a:prstGeom prst="rect">
+            <a:avLst/>
+          </a:prstGeom>
+          <a:noFill/>
+          <a:ln/>
+        </p:spPr>
+        <p:txBody>
+          <a:bodyPr wrap="square" lIns="0" tIns="0" rIns="0" bIns="0" rtlCol="0" anchor="ctr"/>
+          <a:lstStyle/>
+          <a:p>
+            <a:pPr indent="0" marL="0">
+              <a:buNone/>
+            </a:pPr>
+            <a:r>
+              <a:rPr lang="en-US" sz="1150" b="1" spc="200" kern="0" dirty="0">
+                <a:solidFill>
+                  <a:srgbClr val="E2703A"/>
+                </a:solidFill>
+                <a:latin typeface="Meiryo" pitchFamily="34" charset="0"/>
+                <a:ea typeface="Meiryo" pitchFamily="34" charset="-122"/>
+                <a:cs typeface="Meiryo" pitchFamily="34" charset="-120"/>
+              </a:rPr>
+              <a:t>ACTION 03</a:t>
+            </a:r>
+            <a:endParaRPr lang="en-US" sz="1150" dirty="0"/>
+          </a:p>
+        </p:txBody>
+      </p:sp>
+      <p:sp>
+        <p:nvSpPr>
+          <p:cNvPr id="3" name="Text 1"/>
+          <p:cNvSpPr/>
+          <p:nvPr/>
+        </p:nvSpPr>
+        <p:spPr>
+          <a:xfrm>
+            <a:off x="640080" y="411480"/>
+            <a:ext cx="10881360" cy="822960"/>
+          </a:xfrm>
+          <a:prstGeom prst="rect">
+            <a:avLst/>
+          </a:prstGeom>
+          <a:noFill/>
+          <a:ln/>
+        </p:spPr>
+        <p:txBody>
+          <a:bodyPr wrap="square" lIns="0" tIns="0" rIns="0" bIns="0" rtlCol="0" anchor="ctr"/>
+          <a:lstStyle/>
+          <a:p>
+            <a:pPr algn="l" indent="0" marL="0">
+              <a:buNone/>
+            </a:pPr>
+            <a:r>
+              <a:rPr lang="en-US" sz="3000" b="1" dirty="0">
+                <a:solidFill>
+                  <a:srgbClr val="132A4A"/>
+                </a:solidFill>
+                <a:latin typeface="Meiryo" pitchFamily="34" charset="0"/>
+                <a:ea typeface="Meiryo" pitchFamily="34" charset="-122"/>
+                <a:cs typeface="Meiryo" pitchFamily="34" charset="-120"/>
+              </a:rPr>
+              <a:t>参加者は「面」で集め、「名指し」で巻き込む</a:t>
+            </a:r>
+            <a:endParaRPr lang="en-US" sz="3000" dirty="0"/>
+          </a:p>
+        </p:txBody>
+      </p:sp>
+      <p:sp>
+        <p:nvSpPr>
+          <p:cNvPr id="4" name="Text 2"/>
+          <p:cNvSpPr/>
+          <p:nvPr/>
+        </p:nvSpPr>
+        <p:spPr>
+          <a:xfrm>
+            <a:off x="640080" y="1298448"/>
+            <a:ext cx="10881360" cy="365760"/>
+          </a:xfrm>
+          <a:prstGeom prst="rect">
+            <a:avLst/>
+          </a:prstGeom>
+          <a:noFill/>
+          <a:ln/>
+        </p:spPr>
+        <p:txBody>
+          <a:bodyPr wrap="square" lIns="0" tIns="0" rIns="0" bIns="0" rtlCol="0" anchor="ctr"/>
+          <a:lstStyle/>
+          <a:p>
+            <a:pPr indent="0" marL="0">
+              <a:buNone/>
+            </a:pPr>
+            <a:r>
+              <a:rPr lang="en-US" sz="1250" dirty="0">
+                <a:solidFill>
+                  <a:srgbClr val="667384"/>
+                </a:solidFill>
+                <a:latin typeface="Meiryo" pitchFamily="34" charset="0"/>
+                <a:ea typeface="Meiryo" pitchFamily="34" charset="-122"/>
+                <a:cs typeface="Meiryo" pitchFamily="34" charset="-120"/>
+              </a:rPr>
+              <a:t>小規模・高単価な合宿型では、不特定多数へのマス広告ではなく、熱量の高い層へピンポイントでリーチし「当事者」として巻き込む。</a:t>
+            </a:r>
+            <a:endParaRPr lang="en-US" sz="1250" dirty="0"/>
+          </a:p>
+        </p:txBody>
+      </p:sp>
+      <p:sp>
+        <p:nvSpPr>
+          <p:cNvPr id="5" name="Shape 3"/>
+          <p:cNvSpPr/>
+          <p:nvPr/>
+        </p:nvSpPr>
+        <p:spPr>
+          <a:xfrm>
+            <a:off x="640080" y="1874520"/>
+            <a:ext cx="3566160" cy="3520440"/>
+          </a:xfrm>
+          <a:prstGeom prst="roundRect">
+            <a:avLst>
+              <a:gd name="adj" fmla="val 2078"/>
+            </a:avLst>
+          </a:prstGeom>
+          <a:solidFill>
+            <a:srgbClr val="F4F7FA"/>
+          </a:solidFill>
+          <a:ln w="9525">
+            <a:solidFill>
+              <a:srgbClr val="E3E9F0"/>
+            </a:solidFill>
+            <a:prstDash val="solid"/>
+          </a:ln>
+          <a:effectLst>
+            <a:outerShdw sx="100000" sy="100000" kx="0" ky="0" algn="bl" rotWithShape="0" blurRad="101600" dist="508" dir="5400000">
+              <a:srgbClr val="9AA7B5">
+                <a:alpha val="22000"/>
+              </a:srgbClr>
+            </a:outerShdw>
+          </a:effectLst>
+        </p:spPr>
+      </p:sp>
+      <p:sp>
+        <p:nvSpPr>
+          <p:cNvPr id="6" name="Shape 4"/>
+          <p:cNvSpPr/>
+          <p:nvPr/>
+        </p:nvSpPr>
+        <p:spPr>
+          <a:xfrm>
+            <a:off x="932688" y="2148840"/>
+            <a:ext cx="1691640" cy="310896"/>
+          </a:xfrm>
+          <a:prstGeom prst="roundRect">
+            <a:avLst>
+              <a:gd name="adj" fmla="val 50000"/>
+            </a:avLst>
+          </a:prstGeom>
+          <a:solidFill>
+            <a:srgbClr val="E2703A"/>
+          </a:solidFill>
+          <a:ln w="12700">
+            <a:solidFill>
+              <a:srgbClr val="333333"/>
+            </a:solidFill>
+            <a:prstDash val="solid"/>
+          </a:ln>
+        </p:spPr>
+      </p:sp>
+      <p:sp>
+        <p:nvSpPr>
+          <p:cNvPr id="7" name="Text 5"/>
+          <p:cNvSpPr/>
+          <p:nvPr/>
+        </p:nvSpPr>
+        <p:spPr>
+          <a:xfrm>
+            <a:off x="932688" y="2148840"/>
+            <a:ext cx="1691640" cy="310896"/>
+          </a:xfrm>
+          <a:prstGeom prst="rect">
+            <a:avLst/>
+          </a:prstGeom>
+          <a:noFill/>
+          <a:ln/>
+        </p:spPr>
+        <p:txBody>
+          <a:bodyPr wrap="square" lIns="0" tIns="0" rIns="0" bIns="0" rtlCol="0" anchor="ctr"/>
+          <a:lstStyle/>
+          <a:p>
+            <a:pPr algn="ctr" indent="0" marL="0">
+              <a:buNone/>
+            </a:pPr>
+            <a:r>
+              <a:rPr lang="en-US" sz="950" b="1" dirty="0">
+                <a:solidFill>
+                  <a:srgbClr val="FFFFFF"/>
+                </a:solidFill>
+                <a:latin typeface="Meiryo" pitchFamily="34" charset="0"/>
+                <a:ea typeface="Meiryo" pitchFamily="34" charset="-122"/>
+                <a:cs typeface="Meiryo" pitchFamily="34" charset="-120"/>
+              </a:rPr>
+              <a:t>事前熱狂</a:t>
+            </a:r>
+            <a:endParaRPr lang="en-US" sz="950" dirty="0"/>
+          </a:p>
+        </p:txBody>
+      </p:sp>
+      <p:sp>
+        <p:nvSpPr>
+          <p:cNvPr id="8" name="Text 6"/>
+          <p:cNvSpPr/>
+          <p:nvPr/>
+        </p:nvSpPr>
+        <p:spPr>
+          <a:xfrm>
+            <a:off x="932688" y="2606040"/>
+            <a:ext cx="2980944" cy="914400"/>
+          </a:xfrm>
+          <a:prstGeom prst="rect">
+            <a:avLst/>
+          </a:prstGeom>
+          <a:noFill/>
+          <a:ln/>
+        </p:spPr>
+        <p:txBody>
+          <a:bodyPr wrap="square" lIns="0" tIns="0" rIns="0" bIns="0" rtlCol="0" anchor="t"/>
+          <a:lstStyle/>
+          <a:p>
+            <a:pPr indent="0" marL="0">
+              <a:lnSpc>
+                <a:spcPts val="2700"/>
+              </a:lnSpc>
+              <a:buNone/>
+            </a:pPr>
+            <a:r>
+              <a:rPr lang="en-US" sz="2000" b="1" dirty="0">
+                <a:solidFill>
+                  <a:srgbClr val="132A4A"/>
+                </a:solidFill>
+                <a:latin typeface="Meiryo" pitchFamily="34" charset="0"/>
+                <a:ea typeface="Meiryo" pitchFamily="34" charset="-122"/>
+                <a:cs typeface="Meiryo" pitchFamily="34" charset="-120"/>
+              </a:rPr>
+              <a:t>プレヒート</a:t>
+            </a:r>
+            <a:endParaRPr lang="en-US" sz="2000" dirty="0"/>
+          </a:p>
+          <a:p>
+            <a:pPr indent="0" marL="0">
+              <a:lnSpc>
+                <a:spcPts val="2700"/>
+              </a:lnSpc>
+              <a:buNone/>
+            </a:pPr>
+            <a:r>
+              <a:rPr lang="en-US" sz="2000" b="1" dirty="0">
+                <a:solidFill>
+                  <a:srgbClr val="132A4A"/>
+                </a:solidFill>
+                <a:latin typeface="Meiryo" pitchFamily="34" charset="0"/>
+                <a:ea typeface="Meiryo" pitchFamily="34" charset="-122"/>
+                <a:cs typeface="Meiryo" pitchFamily="34" charset="-120"/>
+              </a:rPr>
+              <a:t>イベント</a:t>
+            </a:r>
+            <a:endParaRPr lang="en-US" sz="2000" dirty="0"/>
+          </a:p>
+        </p:txBody>
+      </p:sp>
+      <p:sp>
+        <p:nvSpPr>
+          <p:cNvPr id="9" name="Text 7"/>
+          <p:cNvSpPr/>
+          <p:nvPr/>
+        </p:nvSpPr>
+        <p:spPr>
+          <a:xfrm>
+            <a:off x="932688" y="3566160"/>
+            <a:ext cx="2980944" cy="274320"/>
+          </a:xfrm>
+          <a:prstGeom prst="rect">
+            <a:avLst/>
+          </a:prstGeom>
+          <a:noFill/>
+          <a:ln/>
+        </p:spPr>
+        <p:txBody>
+          <a:bodyPr wrap="square" lIns="0" tIns="0" rIns="0" bIns="0" rtlCol="0" anchor="ctr"/>
+          <a:lstStyle/>
+          <a:p>
+            <a:pPr indent="0" marL="0">
+              <a:buNone/>
+            </a:pPr>
+            <a:r>
+              <a:rPr lang="en-US" sz="1100" b="1" dirty="0">
+                <a:solidFill>
+                  <a:srgbClr val="E2703A"/>
+                </a:solidFill>
+                <a:latin typeface="Meiryo" pitchFamily="34" charset="0"/>
+                <a:ea typeface="Meiryo" pitchFamily="34" charset="-122"/>
+                <a:cs typeface="Meiryo" pitchFamily="34" charset="-120"/>
+              </a:rPr>
+              <a:t>本編の数ヶ月前から</a:t>
+            </a:r>
+            <a:endParaRPr lang="en-US" sz="1100" dirty="0"/>
+          </a:p>
+        </p:txBody>
+      </p:sp>
+      <p:sp>
+        <p:nvSpPr>
+          <p:cNvPr id="10" name="Text 8"/>
+          <p:cNvSpPr/>
+          <p:nvPr/>
+        </p:nvSpPr>
+        <p:spPr>
+          <a:xfrm>
+            <a:off x="932688" y="3886200"/>
+            <a:ext cx="2980944" cy="1371600"/>
+          </a:xfrm>
+          <a:prstGeom prst="rect">
+            <a:avLst/>
+          </a:prstGeom>
+          <a:noFill/>
+          <a:ln/>
+        </p:spPr>
+        <p:txBody>
+          <a:bodyPr wrap="square" lIns="0" tIns="0" rIns="0" bIns="0" rtlCol="0" anchor="t"/>
+          <a:lstStyle/>
+          <a:p>
+            <a:pPr indent="0" marL="0">
+              <a:lnSpc>
+                <a:spcPts val="1800"/>
+              </a:lnSpc>
+              <a:buNone/>
+            </a:pPr>
+            <a:r>
+              <a:rPr lang="en-US" sz="1150" dirty="0">
+                <a:solidFill>
+                  <a:srgbClr val="1F2933"/>
+                </a:solidFill>
+                <a:latin typeface="Meiryo" pitchFamily="34" charset="0"/>
+                <a:ea typeface="Meiryo" pitchFamily="34" charset="-122"/>
+                <a:cs typeface="Meiryo" pitchFamily="34" charset="-120"/>
+              </a:rPr>
+              <a:t>初参加者が抱く「コミュニティのノリについていけるか」という不安を払拭するため、少人数の事前交流会をオンライン・オフラインで開催。CLSの楽しみ方と文脈を先に共有し、参加の心理的ハードルを下げる。</a:t>
+            </a:r>
+            <a:endParaRPr lang="en-US" sz="1150" dirty="0"/>
+          </a:p>
+        </p:txBody>
+      </p:sp>
+      <p:sp>
+        <p:nvSpPr>
+          <p:cNvPr id="11" name="Shape 9"/>
+          <p:cNvSpPr/>
+          <p:nvPr/>
+        </p:nvSpPr>
+        <p:spPr>
+          <a:xfrm>
+            <a:off x="4480560" y="1874520"/>
+            <a:ext cx="3566160" cy="3520440"/>
+          </a:xfrm>
+          <a:prstGeom prst="roundRect">
+            <a:avLst>
+              <a:gd name="adj" fmla="val 2078"/>
+            </a:avLst>
+          </a:prstGeom>
+          <a:solidFill>
+            <a:srgbClr val="F4F7FA"/>
+          </a:solidFill>
+          <a:ln w="9525">
+            <a:solidFill>
+              <a:srgbClr val="E3E9F0"/>
+            </a:solidFill>
+            <a:prstDash val="solid"/>
+          </a:ln>
+          <a:effectLst>
+            <a:outerShdw sx="100000" sy="100000" kx="0" ky="0" algn="bl" rotWithShape="0" blurRad="101600" dist="508" dir="5400000">
+              <a:srgbClr val="9AA7B5">
+                <a:alpha val="22000"/>
+              </a:srgbClr>
+            </a:outerShdw>
+          </a:effectLst>
+        </p:spPr>
+      </p:sp>
+      <p:sp>
+        <p:nvSpPr>
+          <p:cNvPr id="12" name="Shape 10"/>
+          <p:cNvSpPr/>
+          <p:nvPr/>
+        </p:nvSpPr>
+        <p:spPr>
+          <a:xfrm>
+            <a:off x="4773168" y="2148840"/>
+            <a:ext cx="1691640" cy="310896"/>
+          </a:xfrm>
+          <a:prstGeom prst="roundRect">
+            <a:avLst>
+              <a:gd name="adj" fmla="val 50000"/>
+            </a:avLst>
+          </a:prstGeom>
+          <a:solidFill>
+            <a:srgbClr val="132A4A"/>
+          </a:solidFill>
+          <a:ln w="12700">
+            <a:solidFill>
+              <a:srgbClr val="333333"/>
+            </a:solidFill>
+            <a:prstDash val="solid"/>
+          </a:ln>
+        </p:spPr>
+      </p:sp>
+      <p:sp>
+        <p:nvSpPr>
+          <p:cNvPr id="13" name="Text 11"/>
+          <p:cNvSpPr/>
+          <p:nvPr/>
+        </p:nvSpPr>
+        <p:spPr>
+          <a:xfrm>
+            <a:off x="4773168" y="2148840"/>
+            <a:ext cx="1691640" cy="310896"/>
+          </a:xfrm>
+          <a:prstGeom prst="rect">
+            <a:avLst/>
+          </a:prstGeom>
+          <a:noFill/>
+          <a:ln/>
+        </p:spPr>
+        <p:txBody>
+          <a:bodyPr wrap="square" lIns="0" tIns="0" rIns="0" bIns="0" rtlCol="0" anchor="ctr"/>
+          <a:lstStyle/>
+          <a:p>
+            <a:pPr algn="ctr" indent="0" marL="0">
+              <a:buNone/>
+            </a:pPr>
+            <a:r>
+              <a:rPr lang="en-US" sz="950" b="1" dirty="0">
+                <a:solidFill>
+                  <a:srgbClr val="FFFFFF"/>
+                </a:solidFill>
+                <a:latin typeface="Meiryo" pitchFamily="34" charset="0"/>
+                <a:ea typeface="Meiryo" pitchFamily="34" charset="-122"/>
+                <a:cs typeface="Meiryo" pitchFamily="34" charset="-120"/>
+              </a:rPr>
+              <a:t>面で繋ぐ</a:t>
+            </a:r>
+            <a:endParaRPr lang="en-US" sz="950" dirty="0"/>
+          </a:p>
+        </p:txBody>
+      </p:sp>
+      <p:sp>
+        <p:nvSpPr>
+          <p:cNvPr id="14" name="Text 12"/>
+          <p:cNvSpPr/>
+          <p:nvPr/>
+        </p:nvSpPr>
+        <p:spPr>
+          <a:xfrm>
+            <a:off x="4773168" y="2606040"/>
+            <a:ext cx="2980944" cy="914400"/>
+          </a:xfrm>
+          <a:prstGeom prst="rect">
+            <a:avLst/>
+          </a:prstGeom>
+          <a:noFill/>
+          <a:ln/>
+        </p:spPr>
+        <p:txBody>
+          <a:bodyPr wrap="square" lIns="0" tIns="0" rIns="0" bIns="0" rtlCol="0" anchor="t"/>
+          <a:lstStyle/>
+          <a:p>
+            <a:pPr indent="0" marL="0">
+              <a:lnSpc>
+                <a:spcPts val="2700"/>
+              </a:lnSpc>
+              <a:buNone/>
+            </a:pPr>
+            <a:r>
+              <a:rPr lang="en-US" sz="2000" b="1" dirty="0">
+                <a:solidFill>
+                  <a:srgbClr val="132A4A"/>
+                </a:solidFill>
+                <a:latin typeface="Meiryo" pitchFamily="34" charset="0"/>
+                <a:ea typeface="Meiryo" pitchFamily="34" charset="-122"/>
+                <a:cs typeface="Meiryo" pitchFamily="34" charset="-120"/>
+              </a:rPr>
+              <a:t>既存コミュニティ</a:t>
+            </a:r>
+            <a:endParaRPr lang="en-US" sz="2000" dirty="0"/>
+          </a:p>
+          <a:p>
+            <a:pPr indent="0" marL="0">
+              <a:lnSpc>
+                <a:spcPts val="2700"/>
+              </a:lnSpc>
+              <a:buNone/>
+            </a:pPr>
+            <a:r>
+              <a:rPr lang="en-US" sz="2000" b="1" dirty="0">
+                <a:solidFill>
+                  <a:srgbClr val="132A4A"/>
+                </a:solidFill>
+                <a:latin typeface="Meiryo" pitchFamily="34" charset="0"/>
+                <a:ea typeface="Meiryo" pitchFamily="34" charset="-122"/>
+                <a:cs typeface="Meiryo" pitchFamily="34" charset="-120"/>
+              </a:rPr>
+              <a:t>への「出稽古」</a:t>
+            </a:r>
+            <a:endParaRPr lang="en-US" sz="2000" dirty="0"/>
+          </a:p>
+        </p:txBody>
+      </p:sp>
+      <p:sp>
+        <p:nvSpPr>
+          <p:cNvPr id="15" name="Text 13"/>
+          <p:cNvSpPr/>
+          <p:nvPr/>
+        </p:nvSpPr>
+        <p:spPr>
+          <a:xfrm>
+            <a:off x="4773168" y="3566160"/>
+            <a:ext cx="2980944" cy="274320"/>
+          </a:xfrm>
+          <a:prstGeom prst="rect">
+            <a:avLst/>
+          </a:prstGeom>
+          <a:noFill/>
+          <a:ln/>
+        </p:spPr>
+        <p:txBody>
+          <a:bodyPr wrap="square" lIns="0" tIns="0" rIns="0" bIns="0" rtlCol="0" anchor="ctr"/>
+          <a:lstStyle/>
+          <a:p>
+            <a:pPr indent="0" marL="0">
+              <a:buNone/>
+            </a:pPr>
+            <a:r>
+              <a:rPr lang="en-US" sz="1100" b="1" dirty="0">
+                <a:solidFill>
+                  <a:srgbClr val="E2703A"/>
+                </a:solidFill>
+                <a:latin typeface="Meiryo" pitchFamily="34" charset="0"/>
+                <a:ea typeface="Meiryo" pitchFamily="34" charset="-122"/>
+                <a:cs typeface="Meiryo" pitchFamily="34" charset="-120"/>
+              </a:rPr>
+              <a:t>運営メンバー自らが足を運ぶ</a:t>
+            </a:r>
+            <a:endParaRPr lang="en-US" sz="1100" dirty="0"/>
+          </a:p>
+        </p:txBody>
+      </p:sp>
+      <p:sp>
+        <p:nvSpPr>
+          <p:cNvPr id="16" name="Text 14"/>
+          <p:cNvSpPr/>
+          <p:nvPr/>
+        </p:nvSpPr>
+        <p:spPr>
+          <a:xfrm>
+            <a:off x="4773168" y="3886200"/>
+            <a:ext cx="2980944" cy="1371600"/>
+          </a:xfrm>
+          <a:prstGeom prst="rect">
+            <a:avLst/>
+          </a:prstGeom>
+          <a:noFill/>
+          <a:ln/>
+        </p:spPr>
+        <p:txBody>
+          <a:bodyPr wrap="square" lIns="0" tIns="0" rIns="0" bIns="0" rtlCol="0" anchor="t"/>
+          <a:lstStyle/>
+          <a:p>
+            <a:pPr indent="0" marL="0">
+              <a:lnSpc>
+                <a:spcPts val="1800"/>
+              </a:lnSpc>
+              <a:buNone/>
+            </a:pPr>
+            <a:r>
+              <a:rPr lang="en-US" sz="1150" dirty="0">
+                <a:solidFill>
+                  <a:srgbClr val="1F2933"/>
+                </a:solidFill>
+                <a:latin typeface="Meiryo" pitchFamily="34" charset="0"/>
+                <a:ea typeface="Meiryo" pitchFamily="34" charset="-122"/>
+                <a:cs typeface="Meiryo" pitchFamily="34" charset="-120"/>
+              </a:rPr>
+              <a:t>大分・別府エリアの他コミュニティ（技術系勉強会、ITユーザグループ、BEPPU FAN TOWN など）へ運営自らが足を運び、直接参加を呼びかける。点在するコミュニティをCLSというハブへ接続する。</a:t>
+            </a:r>
+            <a:endParaRPr lang="en-US" sz="1150" dirty="0"/>
+          </a:p>
+        </p:txBody>
+      </p:sp>
+      <p:sp>
+        <p:nvSpPr>
+          <p:cNvPr id="17" name="Shape 15"/>
+          <p:cNvSpPr/>
+          <p:nvPr/>
+        </p:nvSpPr>
+        <p:spPr>
+          <a:xfrm>
+            <a:off x="8321040" y="1874520"/>
+            <a:ext cx="3566160" cy="3520440"/>
+          </a:xfrm>
+          <a:prstGeom prst="roundRect">
+            <a:avLst>
+              <a:gd name="adj" fmla="val 2078"/>
+            </a:avLst>
+          </a:prstGeom>
+          <a:solidFill>
+            <a:srgbClr val="F4F7FA"/>
+          </a:solidFill>
+          <a:ln w="9525">
+            <a:solidFill>
+              <a:srgbClr val="E3E9F0"/>
+            </a:solidFill>
+            <a:prstDash val="solid"/>
+          </a:ln>
+          <a:effectLst>
+            <a:outerShdw sx="100000" sy="100000" kx="0" ky="0" algn="bl" rotWithShape="0" blurRad="101600" dist="508" dir="5400000">
+              <a:srgbClr val="9AA7B5">
+                <a:alpha val="22000"/>
+              </a:srgbClr>
+            </a:outerShdw>
+          </a:effectLst>
+        </p:spPr>
+      </p:sp>
+      <p:sp>
+        <p:nvSpPr>
+          <p:cNvPr id="18" name="Shape 16"/>
+          <p:cNvSpPr/>
+          <p:nvPr/>
+        </p:nvSpPr>
+        <p:spPr>
+          <a:xfrm>
+            <a:off x="8613648" y="2148840"/>
+            <a:ext cx="1691640" cy="310896"/>
+          </a:xfrm>
+          <a:prstGeom prst="roundRect">
+            <a:avLst>
+              <a:gd name="adj" fmla="val 50000"/>
+            </a:avLst>
+          </a:prstGeom>
+          <a:solidFill>
+            <a:srgbClr val="1E3E6B"/>
+          </a:solidFill>
+          <a:ln w="12700">
+            <a:solidFill>
+              <a:srgbClr val="333333"/>
+            </a:solidFill>
+            <a:prstDash val="solid"/>
+          </a:ln>
+        </p:spPr>
+      </p:sp>
+      <p:sp>
+        <p:nvSpPr>
+          <p:cNvPr id="19" name="Text 17"/>
+          <p:cNvSpPr/>
+          <p:nvPr/>
+        </p:nvSpPr>
+        <p:spPr>
+          <a:xfrm>
+            <a:off x="8613648" y="2148840"/>
+            <a:ext cx="1691640" cy="310896"/>
+          </a:xfrm>
+          <a:prstGeom prst="rect">
+            <a:avLst/>
+          </a:prstGeom>
+          <a:noFill/>
+          <a:ln/>
+        </p:spPr>
+        <p:txBody>
+          <a:bodyPr wrap="square" lIns="0" tIns="0" rIns="0" bIns="0" rtlCol="0" anchor="ctr"/>
+          <a:lstStyle/>
+          <a:p>
+            <a:pPr algn="ctr" indent="0" marL="0">
+              <a:buNone/>
+            </a:pPr>
+            <a:r>
+              <a:rPr lang="en-US" sz="950" b="1" dirty="0">
+                <a:solidFill>
+                  <a:srgbClr val="FFFFFF"/>
+                </a:solidFill>
+                <a:latin typeface="Meiryo" pitchFamily="34" charset="0"/>
+                <a:ea typeface="Meiryo" pitchFamily="34" charset="-122"/>
+                <a:cs typeface="Meiryo" pitchFamily="34" charset="-120"/>
+              </a:rPr>
+              <a:t>連鎖を生む</a:t>
+            </a:r>
+            <a:endParaRPr lang="en-US" sz="950" dirty="0"/>
+          </a:p>
+        </p:txBody>
+      </p:sp>
+      <p:sp>
+        <p:nvSpPr>
+          <p:cNvPr id="20" name="Text 18"/>
+          <p:cNvSpPr/>
+          <p:nvPr/>
+        </p:nvSpPr>
+        <p:spPr>
+          <a:xfrm>
+            <a:off x="8613648" y="2606040"/>
+            <a:ext cx="2980944" cy="914400"/>
+          </a:xfrm>
+          <a:prstGeom prst="rect">
+            <a:avLst/>
+          </a:prstGeom>
+          <a:noFill/>
+          <a:ln/>
+        </p:spPr>
+        <p:txBody>
+          <a:bodyPr wrap="square" lIns="0" tIns="0" rIns="0" bIns="0" rtlCol="0" anchor="t"/>
+          <a:lstStyle/>
+          <a:p>
+            <a:pPr indent="0" marL="0">
+              <a:lnSpc>
+                <a:spcPts val="2700"/>
+              </a:lnSpc>
+              <a:buNone/>
+            </a:pPr>
+            <a:r>
+              <a:rPr lang="en-US" sz="2000" b="1" dirty="0">
+                <a:solidFill>
+                  <a:srgbClr val="132A4A"/>
+                </a:solidFill>
+                <a:latin typeface="Meiryo" pitchFamily="34" charset="0"/>
+                <a:ea typeface="Meiryo" pitchFamily="34" charset="-122"/>
+                <a:cs typeface="Meiryo" pitchFamily="34" charset="-120"/>
+              </a:rPr>
+              <a:t>「名指し」の</a:t>
+            </a:r>
+            <a:endParaRPr lang="en-US" sz="2000" dirty="0"/>
+          </a:p>
+          <a:p>
+            <a:pPr indent="0" marL="0">
+              <a:lnSpc>
+                <a:spcPts val="2700"/>
+              </a:lnSpc>
+              <a:buNone/>
+            </a:pPr>
+            <a:r>
+              <a:rPr lang="en-US" sz="2000" b="1" dirty="0">
+                <a:solidFill>
+                  <a:srgbClr val="132A4A"/>
+                </a:solidFill>
+                <a:latin typeface="Meiryo" pitchFamily="34" charset="0"/>
+                <a:ea typeface="Meiryo" pitchFamily="34" charset="-122"/>
+                <a:cs typeface="Meiryo" pitchFamily="34" charset="-120"/>
+              </a:rPr>
+              <a:t>巻き込み</a:t>
+            </a:r>
+            <a:endParaRPr lang="en-US" sz="2000" dirty="0"/>
+          </a:p>
+        </p:txBody>
+      </p:sp>
+      <p:sp>
+        <p:nvSpPr>
+          <p:cNvPr id="21" name="Text 19"/>
+          <p:cNvSpPr/>
+          <p:nvPr/>
+        </p:nvSpPr>
+        <p:spPr>
+          <a:xfrm>
+            <a:off x="8613648" y="3566160"/>
+            <a:ext cx="2980944" cy="274320"/>
+          </a:xfrm>
+          <a:prstGeom prst="rect">
+            <a:avLst/>
+          </a:prstGeom>
+          <a:noFill/>
+          <a:ln/>
+        </p:spPr>
+        <p:txBody>
+          <a:bodyPr wrap="square" lIns="0" tIns="0" rIns="0" bIns="0" rtlCol="0" anchor="ctr"/>
+          <a:lstStyle/>
+          <a:p>
+            <a:pPr indent="0" marL="0">
+              <a:buNone/>
+            </a:pPr>
+            <a:r>
+              <a:rPr lang="en-US" sz="1100" b="1" dirty="0">
+                <a:solidFill>
+                  <a:srgbClr val="E2703A"/>
+                </a:solidFill>
+                <a:latin typeface="Meiryo" pitchFamily="34" charset="0"/>
+                <a:ea typeface="Meiryo" pitchFamily="34" charset="-122"/>
+                <a:cs typeface="Meiryo" pitchFamily="34" charset="-120"/>
+              </a:rPr>
+              <a:t>信頼ベースの個別声かけ</a:t>
+            </a:r>
+            <a:endParaRPr lang="en-US" sz="1100" dirty="0"/>
+          </a:p>
+        </p:txBody>
+      </p:sp>
+      <p:sp>
+        <p:nvSpPr>
+          <p:cNvPr id="22" name="Text 20"/>
+          <p:cNvSpPr/>
+          <p:nvPr/>
+        </p:nvSpPr>
+        <p:spPr>
+          <a:xfrm>
+            <a:off x="8613648" y="3886200"/>
+            <a:ext cx="2980944" cy="1371600"/>
+          </a:xfrm>
+          <a:prstGeom prst="rect">
+            <a:avLst/>
+          </a:prstGeom>
+          <a:noFill/>
+          <a:ln/>
+        </p:spPr>
+        <p:txBody>
+          <a:bodyPr wrap="square" lIns="0" tIns="0" rIns="0" bIns="0" rtlCol="0" anchor="t"/>
+          <a:lstStyle/>
+          <a:p>
+            <a:pPr indent="0" marL="0">
+              <a:lnSpc>
+                <a:spcPts val="1800"/>
+              </a:lnSpc>
+              <a:buNone/>
+            </a:pPr>
+            <a:r>
+              <a:rPr lang="en-US" sz="1150" dirty="0">
+                <a:solidFill>
+                  <a:srgbClr val="1F2933"/>
+                </a:solidFill>
+                <a:latin typeface="Meiryo" pitchFamily="34" charset="0"/>
+                <a:ea typeface="Meiryo" pitchFamily="34" charset="-122"/>
+                <a:cs typeface="Meiryo" pitchFamily="34" charset="-120"/>
+              </a:rPr>
+              <a:t>熱量の高い参加者を集める最強の手法は、信頼関係に基づく個別の声かけ。「あなたにこそ来てほしい」と直接伝え、「はい、喜んで」と応じてもらう連鎖を生み、コアな参加者を着実に獲得する。</a:t>
+            </a:r>
+            <a:endParaRPr lang="en-US" sz="1150" dirty="0"/>
+          </a:p>
+        </p:txBody>
+      </p:sp>
+      <p:sp>
+        <p:nvSpPr>
+          <p:cNvPr id="23" name="Text 21"/>
+          <p:cNvSpPr/>
+          <p:nvPr/>
+        </p:nvSpPr>
+        <p:spPr>
+          <a:xfrm>
+            <a:off x="11155680" y="6291072"/>
+            <a:ext cx="548640" cy="320040"/>
+          </a:xfrm>
+          <a:prstGeom prst="rect">
+            <a:avLst/>
+          </a:prstGeom>
+          <a:noFill/>
+          <a:ln/>
+        </p:spPr>
+        <p:txBody>
+          <a:bodyPr wrap="square" lIns="0" tIns="0" rIns="0" bIns="0" rtlCol="0" anchor="ctr"/>
+          <a:lstStyle/>
+          <a:p>
+            <a:pPr algn="r" indent="0" marL="0">
+              <a:buNone/>
+            </a:pPr>
+            <a:r>
+              <a:rPr lang="en-US" sz="1000" dirty="0">
+                <a:solidFill>
+                  <a:srgbClr val="667384"/>
+                </a:solidFill>
+                <a:latin typeface="Meiryo" pitchFamily="34" charset="0"/>
+                <a:ea typeface="Meiryo" pitchFamily="34" charset="-122"/>
+                <a:cs typeface="Meiryo" pitchFamily="34" charset="-120"/>
+              </a:rPr>
+              <a:t>17</a:t>
             </a:r>
             <a:endParaRPr lang="en-US" sz="1000" dirty="0"/>
           </a:p>
@@ -9470,6 +10456,10 @@
             </a:outerShdw>
           </a:effectLst>
         </p:spPr>
+        <p:txBody>
+          <a:bodyPr/>
+          <a:p/>
+        </p:txBody>
       </p:sp>
       <p:sp>
         <p:nvSpPr>
@@ -9596,6 +10586,10 @@
             <a:prstDash val="solid"/>
           </a:ln>
         </p:spPr>
+        <p:txBody>
+          <a:bodyPr/>
+          <a:p/>
+        </p:txBody>
       </p:sp>
       <p:sp>
         <p:nvSpPr>
@@ -9738,6 +10732,10 @@
             <a:prstDash val="solid"/>
           </a:ln>
         </p:spPr>
+        <p:txBody>
+          <a:bodyPr/>
+          <a:p/>
+        </p:txBody>
       </p:sp>
       <p:sp>
         <p:nvSpPr>
@@ -9880,6 +10878,10 @@
             <a:prstDash val="solid"/>
           </a:ln>
         </p:spPr>
+        <p:txBody>
+          <a:bodyPr/>
+          <a:p/>
+        </p:txBody>
       </p:sp>
       <p:sp>
         <p:nvSpPr>
@@ -10022,6 +11024,10 @@
             <a:prstDash val="solid"/>
           </a:ln>
         </p:spPr>
+        <p:txBody>
+          <a:bodyPr/>
+          <a:p/>
+        </p:txBody>
       </p:sp>
       <p:sp>
         <p:nvSpPr>
@@ -10164,6 +11170,10 @@
             <a:prstDash val="solid"/>
           </a:ln>
         </p:spPr>
+        <p:txBody>
+          <a:bodyPr/>
+          <a:p/>
+        </p:txBody>
       </p:sp>
       <p:sp>
         <p:nvSpPr>
@@ -10306,6 +11316,10 @@
             <a:prstDash val="solid"/>
           </a:ln>
         </p:spPr>
+        <p:txBody>
+          <a:bodyPr/>
+          <a:p/>
+        </p:txBody>
       </p:sp>
       <p:sp>
         <p:nvSpPr>
@@ -10418,7 +11432,7 @@
                 <a:ea typeface="Meiryo" pitchFamily="34" charset="-122"/>
                 <a:cs typeface="Meiryo" pitchFamily="34" charset="-120"/>
               </a:rPr>
-              <a:t>運営勧誘と新しい協賛モデル</a:t>
+              <a:t>運営勧誘・協賛モデル・参加者リーチ</a:t>
             </a:r>
             <a:endParaRPr lang="en-US" sz="1150" dirty="0"/>
           </a:p>

--- a/docs/meetings/20260816/CLS別府第2回企画立案.pptx
+++ b/docs/meetings/20260816/CLS別府第2回企画立案.pptx
@@ -1047,10 +1047,8 @@
           <a:lstStyle/>
           <a:p>
             <a:r>
-              <a:rPr lang="en-US" dirty="0"/>
-              <a:t/>
-            </a:r>
-            <a:endParaRPr lang="en-US" dirty="0"/>
+              <a:t>名刺の入稿タイミングを決める。誰に渡すかのリストアップは今日この場で始める。</a:t>
+            </a:r>
           </a:p>
         </p:txBody>
       </p:sp>
@@ -1399,7 +1397,7 @@
           <a:lstStyle/>
           <a:p>
             <a:r>
-              <a:t>集客は本編の告知から始まるのではなく、プレヒートイベントと出稽古から始まる。「名指しの巻き込み」は運営3名それぞれが誰に声をかけるかまで、この場で洗い出す。</a:t>
+              <a:t>出稽古の訪問先リストと、プレヒートの初回開催時期をこの場で仮決めする。</a:t>
             </a:r>
           </a:p>
         </p:txBody>
@@ -2085,10 +2083,8 @@
           <a:lstStyle/>
           <a:p>
             <a:r>
-              <a:rPr lang="en-US" dirty="0"/>
-              <a:t/>
-            </a:r>
-            <a:endParaRPr lang="en-US" dirty="0"/>
+              <a:t>第2回は「本編＋懇親会」のみ。合宿は事後に、次期運営候補だけを対象として実施する。</a:t>
+            </a:r>
           </a:p>
         </p:txBody>
       </p:sp>
@@ -2707,7 +2703,7 @@
                 <a:ea typeface="Meiryo" pitchFamily="34" charset="-122"/>
                 <a:cs typeface="Meiryo" pitchFamily="34" charset="-120"/>
               </a:rPr>
-              <a:t>「規模の縮小」ではなく「濃度の極大化」へ　—　別府・旅館での合宿型開催という解</a:t>
+              <a:t>「規模の縮小」ではなく「濃度の極大化」へ　—　レンガホールでの原点回帰と事後合宿</a:t>
             </a:r>
             <a:endParaRPr lang="en-US" sz="1500" dirty="0"/>
           </a:p>
@@ -2982,7 +2978,7 @@
                 <a:ea typeface="Meiryo" pitchFamily="34" charset="-122"/>
                 <a:cs typeface="Meiryo" pitchFamily="34" charset="-120"/>
               </a:rPr>
-              <a:t>パーパス／ビジョン／ミッション／バリューのドラフト</a:t>
+              <a:t>パーパス／ビジョン／ミッション／バリュー</a:t>
             </a:r>
             <a:endParaRPr lang="en-US" sz="1600" dirty="0"/>
           </a:p>
@@ -3287,7 +3283,7 @@
                 <a:ea typeface="Meiryo" pitchFamily="34" charset="-122"/>
                 <a:cs typeface="Meiryo" pitchFamily="34" charset="-120"/>
               </a:rPr>
-              <a:t>パーパス案</a:t>
+              <a:t>パーパス</a:t>
             </a:r>
             <a:endParaRPr lang="en-US" sz="3000" dirty="0"/>
           </a:p>
@@ -3360,7 +3356,7 @@
                 <a:ea typeface="Meiryo" pitchFamily="34" charset="-122"/>
                 <a:cs typeface="Meiryo" pitchFamily="34" charset="-120"/>
               </a:rPr>
-              <a:t>【案】</a:t>
+              <a:t>P</a:t>
             </a:r>
             <a:endParaRPr lang="en-US" sz="1300" dirty="0"/>
           </a:p>
@@ -3702,7 +3698,7 @@
                 <a:ea typeface="Meiryo" pitchFamily="34" charset="-122"/>
                 <a:cs typeface="Meiryo" pitchFamily="34" charset="-120"/>
               </a:rPr>
-              <a:t>ビジョン案とミッション案</a:t>
+              <a:t>ビジョンとミッション</a:t>
             </a:r>
             <a:endParaRPr lang="en-US" sz="3000" dirty="0"/>
           </a:p>
@@ -4207,7 +4203,7 @@
                 <a:ea typeface="Meiryo" pitchFamily="34" charset="-122"/>
                 <a:cs typeface="Meiryo" pitchFamily="34" charset="-120"/>
               </a:rPr>
-              <a:t>平野氏の「可能性の開花と前進を応援する」に直結。合宿型という濃密な空間で参加者同士が深いレベルで自己開示を行い（同じ湯に浸かり）、一人では踏み出せなかった挑戦への最初のアクションを誘発する（背中を押す）。</a:t>
+              <a:t>平野氏の「可能性の開花と前進を応援する」に直結。濃密な空間で参加者同士が深いレベルで自己開示を行い（同じ湯に浸かり）、一人では踏み出せなかった挑戦への最初のアクションを誘発する（背中を押す）。</a:t>
             </a:r>
             <a:endParaRPr lang="en-US" sz="1200" dirty="0"/>
           </a:p>
@@ -5830,7 +5826,7 @@
                 <a:ea typeface="Meiryo" pitchFamily="34" charset="-122"/>
                 <a:cs typeface="Meiryo" pitchFamily="34" charset="-120"/>
               </a:rPr>
-              <a:t>「大分・別府という特異なフィールドで、地域課題の最前線に立つリーダーたちと深い関係値を築けます。合宿という密室空間で、自社の技術やビジョンへの強い共感者（エバンジェリスト）を生み出す場です。」</a:t>
+              <a:t>「大分・別府という特異なフィールドで、地域課題の最前線に立つリーダーたちと深い関係値を築けます。自社の技術やビジョンへの強い共感者（エバンジェリスト）を生み出す場です。」</a:t>
             </a:r>
             <a:endParaRPr lang="en-US" sz="1100" dirty="0"/>
           </a:p>
@@ -6018,7 +6014,7 @@
                 <a:ea typeface="Meiryo" pitchFamily="34" charset="-122"/>
                 <a:cs typeface="Meiryo" pitchFamily="34" charset="-120"/>
               </a:rPr>
-              <a:t>運営メンバーは「量より質」で獲る</a:t>
+              <a:t>PVMVを刻んだ「名刺」で名指しに巻き込む</a:t>
             </a:r>
             <a:endParaRPr lang="en-US" sz="3000" dirty="0"/>
           </a:p>
@@ -6057,7 +6053,7 @@
                 <a:ea typeface="Meiryo" pitchFamily="34" charset="-122"/>
                 <a:cs typeface="Meiryo" pitchFamily="34" charset="-120"/>
               </a:rPr>
-              <a:t>極端に増やせない以上、自走できるコアメンバー（各領域のハブとなれる人材）の確保が急務。</a:t>
+              <a:t>今後の登壇者・参加者・スポンサー候補へのリーチにおいて、最大の武器となるのが「PVMVを記載した専用名刺」の活用である。</a:t>
             </a:r>
             <a:endParaRPr lang="en-US" sz="1250" dirty="0"/>
           </a:p>
@@ -6194,7 +6190,7 @@
                 <a:ea typeface="Meiryo" pitchFamily="34" charset="-122"/>
                 <a:cs typeface="Meiryo" pitchFamily="34" charset="-120"/>
               </a:rPr>
-              <a:t>ターゲット層</a:t>
+              <a:t>誰に渡すか</a:t>
             </a:r>
             <a:endParaRPr lang="en-US" sz="1700" dirty="0"/>
           </a:p>
@@ -6236,7 +6232,7 @@
                 <a:ea typeface="Meiryo" pitchFamily="34" charset="-122"/>
                 <a:cs typeface="Meiryo" pitchFamily="34" charset="-120"/>
               </a:rPr>
-              <a:t>大分・別府エリアで、すでに小規模なコミュニティを主宰しているリーダー層。</a:t>
+              <a:t>運営3名がそれぞれの日常業務や他のコミュニティ活動の中で出会った「熱量の高い人」。</a:t>
             </a:r>
             <a:endParaRPr lang="en-US" sz="1300" dirty="0"/>
           </a:p>
@@ -6302,7 +6298,7 @@
                 <a:ea typeface="Meiryo" pitchFamily="34" charset="-122"/>
                 <a:cs typeface="Meiryo" pitchFamily="34" charset="-120"/>
               </a:rPr>
-              <a:t>技術勉強会の主催者</a:t>
+              <a:t>技術勉強会・ユーザグループ</a:t>
             </a:r>
             <a:endParaRPr lang="en-US" sz="1200" dirty="0"/>
           </a:p>
@@ -6368,7 +6364,7 @@
                 <a:ea typeface="Meiryo" pitchFamily="34" charset="-122"/>
                 <a:cs typeface="Meiryo" pitchFamily="34" charset="-120"/>
               </a:rPr>
-              <a:t>若手経営者の会</a:t>
+              <a:t>金融機関の営業活動・取引先</a:t>
             </a:r>
             <a:endParaRPr lang="en-US" sz="1200" dirty="0"/>
           </a:p>
@@ -6434,7 +6430,7 @@
                 <a:ea typeface="Meiryo" pitchFamily="34" charset="-122"/>
                 <a:cs typeface="Meiryo" pitchFamily="34" charset="-120"/>
               </a:rPr>
-              <a:t>地域おこしの任意団体</a:t>
+              <a:t>地域コミュニティのリーダー</a:t>
             </a:r>
             <a:endParaRPr lang="en-US" sz="1200" dirty="0"/>
           </a:p>
@@ -6448,7 +6444,7 @@
         </p:nvSpPr>
         <p:spPr>
           <a:xfrm>
-            <a:off x="960120" y="4937760"/>
+            <a:off x="960120" y="4846320"/>
             <a:ext cx="4754880" cy="320040"/>
           </a:xfrm>
           <a:prstGeom prst="rect">
@@ -6473,7 +6469,7 @@
                 <a:ea typeface="Meiryo" pitchFamily="34" charset="-122"/>
                 <a:cs typeface="Meiryo" pitchFamily="34" charset="-120"/>
               </a:rPr>
-              <a:t>ただし、活動の広がりや運営に限界（孤独感）を感じていること。</a:t>
+              <a:t>登壇してほしい人、来てほしい人を名指しで決めてから渡す。</a:t>
             </a:r>
             <a:endParaRPr lang="en-US" sz="1150" dirty="0"/>
           </a:p>
@@ -6610,7 +6606,7 @@
                 <a:ea typeface="Meiryo" pitchFamily="34" charset="-122"/>
                 <a:cs typeface="Meiryo" pitchFamily="34" charset="-120"/>
               </a:rPr>
-              <a:t>アプローチ手法</a:t>
+              <a:t>名刺で何を伝えるか</a:t>
             </a:r>
             <a:endParaRPr lang="en-US" sz="1700" dirty="0"/>
           </a:p>
@@ -6649,7 +6645,7 @@
                 <a:ea typeface="Meiryo" pitchFamily="34" charset="-122"/>
                 <a:cs typeface="Meiryo" pitchFamily="34" charset="-120"/>
               </a:rPr>
-              <a:t>× 労働力の要求</a:t>
+              <a:t>× 単なるイベント告知</a:t>
             </a:r>
             <a:endParaRPr lang="en-US" sz="1350" dirty="0"/>
           </a:p>
@@ -6688,7 +6684,7 @@
                 <a:ea typeface="Meiryo" pitchFamily="34" charset="-122"/>
                 <a:cs typeface="Meiryo" pitchFamily="34" charset="-120"/>
               </a:rPr>
-              <a:t>「イベントの手伝いをしてほしい」</a:t>
+              <a:t>日時と会場だけを伝えるチラシ配り</a:t>
             </a:r>
             <a:endParaRPr lang="en-US" sz="1200" dirty="0"/>
           </a:p>
@@ -6727,7 +6723,7 @@
                 <a:ea typeface="Meiryo" pitchFamily="34" charset="-122"/>
                 <a:cs typeface="Meiryo" pitchFamily="34" charset="-120"/>
               </a:rPr>
-              <a:t>○ 相互利益の提案</a:t>
+              <a:t>○ 理念共感型のリクルーティング</a:t>
             </a:r>
             <a:endParaRPr lang="en-US" sz="1350" dirty="0"/>
           </a:p>
@@ -6769,7 +6765,7 @@
                 <a:ea typeface="Meiryo" pitchFamily="34" charset="-122"/>
                 <a:cs typeface="Meiryo" pitchFamily="34" charset="-120"/>
               </a:rPr>
-              <a:t>「CLSという全国規模のプラットフォームを使って、あなたのコミュニティ活動のステージを一段引き上げないか？」</a:t>
+              <a:t>「我々はこういうビジョンで動いている。あなたに登壇してほしい」。名刺を手渡して「あなたにこそ来てほしい」と直接伝え、「はい、喜んで」の連鎖を生む。</a:t>
             </a:r>
             <a:endParaRPr lang="en-US" sz="1300" dirty="0"/>
           </a:p>
@@ -6957,7 +6953,7 @@
                 <a:ea typeface="Meiryo" pitchFamily="34" charset="-122"/>
                 <a:cs typeface="Meiryo" pitchFamily="34" charset="-120"/>
               </a:rPr>
-              <a:t>小規模開催では、ロゴ掲載型の広告協賛は企業側の投資対効果が合わない。合宿型ならではのメニューへ転換する。</a:t>
+              <a:t>小規模開催では、ロゴ掲載型の広告協賛は企業側の投資対効果が合わない。小規模開催ならではのメニューへ転換する。</a:t>
             </a:r>
             <a:endParaRPr lang="en-US" sz="1250" dirty="0"/>
           </a:p>
@@ -7200,7 +7196,7 @@
                 <a:ea typeface="Meiryo" pitchFamily="34" charset="-122"/>
                 <a:cs typeface="Meiryo" pitchFamily="34" charset="-120"/>
               </a:rPr>
-              <a:t>協賛企業の経営層や次世代リーダー候補を合宿へ派遣。彼らが抱えるリアルな事業課題（DX推進、採用難、新規事業開発）を、全国から集まった越境人材が夜通し議論し、解決の糸口を提示する「課題解決セッション」。</a:t>
+              <a:t>協賛企業の経営層や次世代リーダー候補を本編へ派遣。彼らが抱えるリアルな事業課題（DX推進、採用難、新規事業開発）を、全国から集まった越境人材が議論し、解決の糸口を提示する「課題解決セッション」。</a:t>
             </a:r>
             <a:endParaRPr lang="en-US" sz="1150" dirty="0"/>
           </a:p>
@@ -7443,7 +7439,7 @@
                 <a:ea typeface="Meiryo" pitchFamily="34" charset="-122"/>
                 <a:cs typeface="Meiryo" pitchFamily="34" charset="-120"/>
               </a:rPr>
-              <a:t>地域金融機関の立場から、地元中小企業に「社外の知見を導入するための実践的な社員研修」としてCLSへの協賛・参加を提案。大分市での開催も含め、地域のオープンイノベーションの場と位置づける。</a:t>
+              <a:t>地域金融機関の立場から、地元中小企業に「社外の知見を導入するための実践的な社員研修」としてCLSへの協賛・参加を提案。別府・レンガホールを地域のオープンイノベーションの場と位置づける。</a:t>
             </a:r>
             <a:endParaRPr lang="en-US" sz="1150" dirty="0"/>
           </a:p>
@@ -7740,6 +7736,666 @@
 </file>
 
 <file path=ppt/slides/slide17.xml><?xml version="1.0" encoding="utf-8"?>
+<p:sld xmlns:a="http://schemas.openxmlformats.org/drawingml/2006/main" xmlns:p="http://schemas.openxmlformats.org/presentationml/2006/main" xmlns:r="http://schemas.openxmlformats.org/officeDocument/2006/relationships">
+  <p:cSld>
+    <p:spTree>
+      <p:nvGrpSpPr>
+        <p:cNvPr id="1" name=""/>
+        <p:cNvGrpSpPr/>
+        <p:nvPr/>
+      </p:nvGrpSpPr>
+      <p:grpSpPr/>
+      <p:sp>
+        <p:nvSpPr>
+          <p:cNvPr id="2" name="Text 0"/>
+          <p:cNvSpPr/>
+          <p:nvPr/>
+        </p:nvSpPr>
+        <p:spPr>
+          <a:xfrm>
+            <a:off x="640080" y="201168"/>
+            <a:ext cx="10881360" cy="274320"/>
+          </a:xfrm>
+          <a:prstGeom prst="rect">
+            <a:avLst/>
+          </a:prstGeom>
+          <a:noFill/>
+          <a:ln/>
+        </p:spPr>
+        <p:txBody>
+          <a:bodyPr wrap="square" lIns="0" tIns="0" rIns="0" bIns="0" rtlCol="0" anchor="ctr"/>
+          <a:lstStyle/>
+          <a:p>
+            <a:pPr indent="0" marL="0">
+              <a:buNone/>
+            </a:pPr>
+            <a:r>
+              <a:rPr lang="en-US" sz="1150" b="1" spc="200" kern="0" dirty="0">
+                <a:solidFill>
+                  <a:srgbClr val="E2703A"/>
+                </a:solidFill>
+                <a:latin typeface="Meiryo" pitchFamily="34" charset="0"/>
+                <a:ea typeface="Meiryo" pitchFamily="34" charset="-122"/>
+                <a:cs typeface="Meiryo" pitchFamily="34" charset="-120"/>
+              </a:rPr>
+              <a:t>ACTION 03</a:t>
+            </a:r>
+            <a:endParaRPr lang="en-US" sz="1150" dirty="0"/>
+          </a:p>
+        </p:txBody>
+      </p:sp>
+      <p:sp>
+        <p:nvSpPr>
+          <p:cNvPr id="3" name="Text 1"/>
+          <p:cNvSpPr/>
+          <p:nvPr/>
+        </p:nvSpPr>
+        <p:spPr>
+          <a:xfrm>
+            <a:off x="640080" y="411480"/>
+            <a:ext cx="10881360" cy="822960"/>
+          </a:xfrm>
+          <a:prstGeom prst="rect">
+            <a:avLst/>
+          </a:prstGeom>
+          <a:noFill/>
+          <a:ln/>
+        </p:spPr>
+        <p:txBody>
+          <a:bodyPr wrap="square" lIns="0" tIns="0" rIns="0" bIns="0" rtlCol="0" anchor="ctr"/>
+          <a:lstStyle/>
+          <a:p>
+            <a:pPr algn="l" indent="0" marL="0">
+              <a:buNone/>
+            </a:pPr>
+            <a:r>
+              <a:rPr lang="en-US" sz="3000" b="1" dirty="0">
+                <a:solidFill>
+                  <a:srgbClr val="132A4A"/>
+                </a:solidFill>
+                <a:latin typeface="Meiryo" pitchFamily="34" charset="0"/>
+                <a:ea typeface="Meiryo" pitchFamily="34" charset="-122"/>
+                <a:cs typeface="Meiryo" pitchFamily="34" charset="-120"/>
+              </a:rPr>
+              <a:t>参加者は「面」で集め、「名指し」で巻き込む</a:t>
+            </a:r>
+            <a:endParaRPr lang="en-US" sz="3000" dirty="0"/>
+          </a:p>
+        </p:txBody>
+      </p:sp>
+      <p:sp>
+        <p:nvSpPr>
+          <p:cNvPr id="4" name="Text 2"/>
+          <p:cNvSpPr/>
+          <p:nvPr/>
+        </p:nvSpPr>
+        <p:spPr>
+          <a:xfrm>
+            <a:off x="640080" y="1298448"/>
+            <a:ext cx="10881360" cy="365760"/>
+          </a:xfrm>
+          <a:prstGeom prst="rect">
+            <a:avLst/>
+          </a:prstGeom>
+          <a:noFill/>
+          <a:ln/>
+        </p:spPr>
+        <p:txBody>
+          <a:bodyPr wrap="square" lIns="0" tIns="0" rIns="0" bIns="0" rtlCol="0" anchor="ctr"/>
+          <a:lstStyle/>
+          <a:p>
+            <a:pPr indent="0" marL="0">
+              <a:buNone/>
+            </a:pPr>
+            <a:r>
+              <a:rPr lang="en-US" sz="1250" dirty="0">
+                <a:solidFill>
+                  <a:srgbClr val="667384"/>
+                </a:solidFill>
+                <a:latin typeface="Meiryo" pitchFamily="34" charset="0"/>
+                <a:ea typeface="Meiryo" pitchFamily="34" charset="-122"/>
+                <a:cs typeface="Meiryo" pitchFamily="34" charset="-120"/>
+              </a:rPr>
+              <a:t>不特定多数へのマス広告ではなく、熱量の高い層へピンポイントでリーチする。PVMV名刺を携えて「当事者」として巻き込む。</a:t>
+            </a:r>
+            <a:endParaRPr lang="en-US" sz="1250" dirty="0"/>
+          </a:p>
+        </p:txBody>
+      </p:sp>
+      <p:sp>
+        <p:nvSpPr>
+          <p:cNvPr id="5" name="Shape 3"/>
+          <p:cNvSpPr/>
+          <p:nvPr/>
+        </p:nvSpPr>
+        <p:spPr>
+          <a:xfrm>
+            <a:off x="640080" y="1874520"/>
+            <a:ext cx="5394960" cy="3520440"/>
+          </a:xfrm>
+          <a:prstGeom prst="roundRect">
+            <a:avLst>
+              <a:gd name="adj" fmla="val 2078"/>
+            </a:avLst>
+          </a:prstGeom>
+          <a:solidFill>
+            <a:srgbClr val="F4F7FA"/>
+          </a:solidFill>
+          <a:ln w="9525">
+            <a:solidFill>
+              <a:srgbClr val="E3E9F0"/>
+            </a:solidFill>
+            <a:prstDash val="solid"/>
+          </a:ln>
+          <a:effectLst>
+            <a:outerShdw sx="100000" sy="100000" kx="0" ky="0" algn="bl" rotWithShape="0" blurRad="101600" dist="508" dir="5400000">
+              <a:srgbClr val="9AA7B5">
+                <a:alpha val="22000"/>
+              </a:srgbClr>
+            </a:outerShdw>
+          </a:effectLst>
+        </p:spPr>
+      </p:sp>
+      <p:sp>
+        <p:nvSpPr>
+          <p:cNvPr id="6" name="Shape 4"/>
+          <p:cNvSpPr/>
+          <p:nvPr/>
+        </p:nvSpPr>
+        <p:spPr>
+          <a:xfrm>
+            <a:off x="932688" y="2148840"/>
+            <a:ext cx="1691640" cy="310896"/>
+          </a:xfrm>
+          <a:prstGeom prst="roundRect">
+            <a:avLst>
+              <a:gd name="adj" fmla="val 50000"/>
+            </a:avLst>
+          </a:prstGeom>
+          <a:solidFill>
+            <a:srgbClr val="E2703A"/>
+          </a:solidFill>
+          <a:ln w="12700">
+            <a:solidFill>
+              <a:srgbClr val="333333"/>
+            </a:solidFill>
+            <a:prstDash val="solid"/>
+          </a:ln>
+        </p:spPr>
+      </p:sp>
+      <p:sp>
+        <p:nvSpPr>
+          <p:cNvPr id="7" name="Text 5"/>
+          <p:cNvSpPr/>
+          <p:nvPr/>
+        </p:nvSpPr>
+        <p:spPr>
+          <a:xfrm>
+            <a:off x="932688" y="2148840"/>
+            <a:ext cx="1691640" cy="310896"/>
+          </a:xfrm>
+          <a:prstGeom prst="rect">
+            <a:avLst/>
+          </a:prstGeom>
+          <a:noFill/>
+          <a:ln/>
+        </p:spPr>
+        <p:txBody>
+          <a:bodyPr wrap="square" lIns="0" tIns="0" rIns="0" bIns="0" rtlCol="0" anchor="ctr"/>
+          <a:lstStyle/>
+          <a:p>
+            <a:pPr algn="ctr" indent="0" marL="0">
+              <a:buNone/>
+            </a:pPr>
+            <a:r>
+              <a:rPr lang="en-US" sz="950" b="1" dirty="0">
+                <a:solidFill>
+                  <a:srgbClr val="FFFFFF"/>
+                </a:solidFill>
+                <a:latin typeface="Meiryo" pitchFamily="34" charset="0"/>
+                <a:ea typeface="Meiryo" pitchFamily="34" charset="-122"/>
+                <a:cs typeface="Meiryo" pitchFamily="34" charset="-120"/>
+              </a:rPr>
+              <a:t>面で繋ぐ</a:t>
+            </a:r>
+            <a:endParaRPr lang="en-US" sz="950" dirty="0"/>
+          </a:p>
+        </p:txBody>
+      </p:sp>
+      <p:sp>
+        <p:nvSpPr>
+          <p:cNvPr id="8" name="Text 6"/>
+          <p:cNvSpPr/>
+          <p:nvPr/>
+        </p:nvSpPr>
+        <p:spPr>
+          <a:xfrm>
+            <a:off x="932688" y="2606040"/>
+            <a:ext cx="4809744" cy="914400"/>
+          </a:xfrm>
+          <a:prstGeom prst="rect">
+            <a:avLst/>
+          </a:prstGeom>
+          <a:noFill/>
+          <a:ln/>
+        </p:spPr>
+        <p:txBody>
+          <a:bodyPr wrap="square" lIns="0" tIns="0" rIns="0" bIns="0" rtlCol="0" anchor="t"/>
+          <a:lstStyle/>
+          <a:p>
+            <a:pPr indent="0" marL="0">
+              <a:lnSpc>
+                <a:spcPts val="2700"/>
+              </a:lnSpc>
+              <a:buNone/>
+            </a:pPr>
+            <a:r>
+              <a:rPr lang="en-US" sz="2000" b="1" dirty="0">
+                <a:solidFill>
+                  <a:srgbClr val="132A4A"/>
+                </a:solidFill>
+                <a:latin typeface="Meiryo" pitchFamily="34" charset="0"/>
+                <a:ea typeface="Meiryo" pitchFamily="34" charset="-122"/>
+                <a:cs typeface="Meiryo" pitchFamily="34" charset="-120"/>
+              </a:rPr>
+              <a:t>既存コミュニティ</a:t>
+            </a:r>
+            <a:endParaRPr lang="en-US" sz="2000" dirty="0"/>
+          </a:p>
+          <a:p>
+            <a:pPr indent="0" marL="0">
+              <a:lnSpc>
+                <a:spcPts val="2700"/>
+              </a:lnSpc>
+              <a:buNone/>
+            </a:pPr>
+            <a:r>
+              <a:rPr lang="en-US" sz="2000" b="1" dirty="0">
+                <a:solidFill>
+                  <a:srgbClr val="132A4A"/>
+                </a:solidFill>
+                <a:latin typeface="Meiryo" pitchFamily="34" charset="0"/>
+                <a:ea typeface="Meiryo" pitchFamily="34" charset="-122"/>
+                <a:cs typeface="Meiryo" pitchFamily="34" charset="-120"/>
+              </a:rPr>
+              <a:t>への「出稽古」</a:t>
+            </a:r>
+            <a:endParaRPr lang="en-US" sz="2000" dirty="0"/>
+          </a:p>
+        </p:txBody>
+      </p:sp>
+      <p:sp>
+        <p:nvSpPr>
+          <p:cNvPr id="9" name="Text 7"/>
+          <p:cNvSpPr/>
+          <p:nvPr/>
+        </p:nvSpPr>
+        <p:spPr>
+          <a:xfrm>
+            <a:off x="932688" y="3566160"/>
+            <a:ext cx="4809744" cy="274320"/>
+          </a:xfrm>
+          <a:prstGeom prst="rect">
+            <a:avLst/>
+          </a:prstGeom>
+          <a:noFill/>
+          <a:ln/>
+        </p:spPr>
+        <p:txBody>
+          <a:bodyPr wrap="square" lIns="0" tIns="0" rIns="0" bIns="0" rtlCol="0" anchor="ctr"/>
+          <a:lstStyle/>
+          <a:p>
+            <a:pPr indent="0" marL="0">
+              <a:buNone/>
+            </a:pPr>
+            <a:r>
+              <a:rPr lang="en-US" sz="1100" b="1" dirty="0">
+                <a:solidFill>
+                  <a:srgbClr val="E2703A"/>
+                </a:solidFill>
+                <a:latin typeface="Meiryo" pitchFamily="34" charset="0"/>
+                <a:ea typeface="Meiryo" pitchFamily="34" charset="-122"/>
+                <a:cs typeface="Meiryo" pitchFamily="34" charset="-120"/>
+              </a:rPr>
+              <a:t>運営メンバー自らが足を運ぶ</a:t>
+            </a:r>
+            <a:endParaRPr lang="en-US" sz="1100" dirty="0"/>
+          </a:p>
+        </p:txBody>
+      </p:sp>
+      <p:sp>
+        <p:nvSpPr>
+          <p:cNvPr id="10" name="Text 8"/>
+          <p:cNvSpPr/>
+          <p:nvPr/>
+        </p:nvSpPr>
+        <p:spPr>
+          <a:xfrm>
+            <a:off x="932688" y="3886200"/>
+            <a:ext cx="4809744" cy="1371600"/>
+          </a:xfrm>
+          <a:prstGeom prst="rect">
+            <a:avLst/>
+          </a:prstGeom>
+          <a:noFill/>
+          <a:ln/>
+        </p:spPr>
+        <p:txBody>
+          <a:bodyPr wrap="square" lIns="0" tIns="0" rIns="0" bIns="0" rtlCol="0" anchor="t"/>
+          <a:lstStyle/>
+          <a:p>
+            <a:pPr indent="0" marL="0">
+              <a:lnSpc>
+                <a:spcPts val="1800"/>
+              </a:lnSpc>
+              <a:buNone/>
+            </a:pPr>
+            <a:r>
+              <a:rPr lang="en-US" sz="1150" dirty="0">
+                <a:solidFill>
+                  <a:srgbClr val="1F2933"/>
+                </a:solidFill>
+                <a:latin typeface="Meiryo" pitchFamily="34" charset="0"/>
+                <a:ea typeface="Meiryo" pitchFamily="34" charset="-122"/>
+                <a:cs typeface="Meiryo" pitchFamily="34" charset="-120"/>
+              </a:rPr>
+              <a:t>大分・別府エリアの他コミュニティ（技術系勉強会、ITユーザグループ、BEPPU FAN TOWN など）へ運営自らが足を運び、PVMV名刺を配りながら直接参加を呼びかける。点在するコミュニティをCLSというハブへ接続する。</a:t>
+            </a:r>
+            <a:endParaRPr lang="en-US" sz="1150" dirty="0"/>
+          </a:p>
+        </p:txBody>
+      </p:sp>
+      <p:sp>
+        <p:nvSpPr>
+          <p:cNvPr id="11" name="Shape 9"/>
+          <p:cNvSpPr/>
+          <p:nvPr/>
+        </p:nvSpPr>
+        <p:spPr>
+          <a:xfrm>
+            <a:off x="6400800" y="1874520"/>
+            <a:ext cx="5394960" cy="3520440"/>
+          </a:xfrm>
+          <a:prstGeom prst="roundRect">
+            <a:avLst>
+              <a:gd name="adj" fmla="val 2078"/>
+            </a:avLst>
+          </a:prstGeom>
+          <a:solidFill>
+            <a:srgbClr val="F4F7FA"/>
+          </a:solidFill>
+          <a:ln w="9525">
+            <a:solidFill>
+              <a:srgbClr val="E3E9F0"/>
+            </a:solidFill>
+            <a:prstDash val="solid"/>
+          </a:ln>
+          <a:effectLst>
+            <a:outerShdw sx="100000" sy="100000" kx="0" ky="0" algn="bl" rotWithShape="0" blurRad="101600" dist="508" dir="5400000">
+              <a:srgbClr val="9AA7B5">
+                <a:alpha val="22000"/>
+              </a:srgbClr>
+            </a:outerShdw>
+          </a:effectLst>
+        </p:spPr>
+      </p:sp>
+      <p:sp>
+        <p:nvSpPr>
+          <p:cNvPr id="12" name="Shape 10"/>
+          <p:cNvSpPr/>
+          <p:nvPr/>
+        </p:nvSpPr>
+        <p:spPr>
+          <a:xfrm>
+            <a:off x="6693408" y="2148840"/>
+            <a:ext cx="1691640" cy="310896"/>
+          </a:xfrm>
+          <a:prstGeom prst="roundRect">
+            <a:avLst>
+              <a:gd name="adj" fmla="val 50000"/>
+            </a:avLst>
+          </a:prstGeom>
+          <a:solidFill>
+            <a:srgbClr val="132A4A"/>
+          </a:solidFill>
+          <a:ln w="12700">
+            <a:solidFill>
+              <a:srgbClr val="333333"/>
+            </a:solidFill>
+            <a:prstDash val="solid"/>
+          </a:ln>
+        </p:spPr>
+      </p:sp>
+      <p:sp>
+        <p:nvSpPr>
+          <p:cNvPr id="13" name="Text 11"/>
+          <p:cNvSpPr/>
+          <p:nvPr/>
+        </p:nvSpPr>
+        <p:spPr>
+          <a:xfrm>
+            <a:off x="6693408" y="2148840"/>
+            <a:ext cx="1691640" cy="310896"/>
+          </a:xfrm>
+          <a:prstGeom prst="rect">
+            <a:avLst/>
+          </a:prstGeom>
+          <a:noFill/>
+          <a:ln/>
+        </p:spPr>
+        <p:txBody>
+          <a:bodyPr wrap="square" lIns="0" tIns="0" rIns="0" bIns="0" rtlCol="0" anchor="ctr"/>
+          <a:lstStyle/>
+          <a:p>
+            <a:pPr algn="ctr" indent="0" marL="0">
+              <a:buNone/>
+            </a:pPr>
+            <a:r>
+              <a:rPr lang="en-US" sz="950" b="1" dirty="0">
+                <a:solidFill>
+                  <a:srgbClr val="FFFFFF"/>
+                </a:solidFill>
+                <a:latin typeface="Meiryo" pitchFamily="34" charset="0"/>
+                <a:ea typeface="Meiryo" pitchFamily="34" charset="-122"/>
+                <a:cs typeface="Meiryo" pitchFamily="34" charset="-120"/>
+              </a:rPr>
+              <a:t>事前熱狂</a:t>
+            </a:r>
+            <a:endParaRPr lang="en-US" sz="950" dirty="0"/>
+          </a:p>
+        </p:txBody>
+      </p:sp>
+      <p:sp>
+        <p:nvSpPr>
+          <p:cNvPr id="14" name="Text 12"/>
+          <p:cNvSpPr/>
+          <p:nvPr/>
+        </p:nvSpPr>
+        <p:spPr>
+          <a:xfrm>
+            <a:off x="6693408" y="2606040"/>
+            <a:ext cx="4809744" cy="914400"/>
+          </a:xfrm>
+          <a:prstGeom prst="rect">
+            <a:avLst/>
+          </a:prstGeom>
+          <a:noFill/>
+          <a:ln/>
+        </p:spPr>
+        <p:txBody>
+          <a:bodyPr wrap="square" lIns="0" tIns="0" rIns="0" bIns="0" rtlCol="0" anchor="t"/>
+          <a:lstStyle/>
+          <a:p>
+            <a:pPr indent="0" marL="0">
+              <a:lnSpc>
+                <a:spcPts val="2700"/>
+              </a:lnSpc>
+              <a:buNone/>
+            </a:pPr>
+            <a:r>
+              <a:rPr lang="en-US" sz="2000" b="1" dirty="0">
+                <a:solidFill>
+                  <a:srgbClr val="132A4A"/>
+                </a:solidFill>
+                <a:latin typeface="Meiryo" pitchFamily="34" charset="0"/>
+                <a:ea typeface="Meiryo" pitchFamily="34" charset="-122"/>
+                <a:cs typeface="Meiryo" pitchFamily="34" charset="-120"/>
+              </a:rPr>
+              <a:t>プレヒート</a:t>
+            </a:r>
+            <a:endParaRPr lang="en-US" sz="2000" dirty="0"/>
+          </a:p>
+          <a:p>
+            <a:pPr indent="0" marL="0">
+              <a:lnSpc>
+                <a:spcPts val="2700"/>
+              </a:lnSpc>
+              <a:buNone/>
+            </a:pPr>
+            <a:r>
+              <a:rPr lang="en-US" sz="2000" b="1" dirty="0">
+                <a:solidFill>
+                  <a:srgbClr val="132A4A"/>
+                </a:solidFill>
+                <a:latin typeface="Meiryo" pitchFamily="34" charset="0"/>
+                <a:ea typeface="Meiryo" pitchFamily="34" charset="-122"/>
+                <a:cs typeface="Meiryo" pitchFamily="34" charset="-120"/>
+              </a:rPr>
+              <a:t>イベント</a:t>
+            </a:r>
+            <a:endParaRPr lang="en-US" sz="2000" dirty="0"/>
+          </a:p>
+        </p:txBody>
+      </p:sp>
+      <p:sp>
+        <p:nvSpPr>
+          <p:cNvPr id="15" name="Text 13"/>
+          <p:cNvSpPr/>
+          <p:nvPr/>
+        </p:nvSpPr>
+        <p:spPr>
+          <a:xfrm>
+            <a:off x="6693408" y="3566160"/>
+            <a:ext cx="4809744" cy="274320"/>
+          </a:xfrm>
+          <a:prstGeom prst="rect">
+            <a:avLst/>
+          </a:prstGeom>
+          <a:noFill/>
+          <a:ln/>
+        </p:spPr>
+        <p:txBody>
+          <a:bodyPr wrap="square" lIns="0" tIns="0" rIns="0" bIns="0" rtlCol="0" anchor="ctr"/>
+          <a:lstStyle/>
+          <a:p>
+            <a:pPr indent="0" marL="0">
+              <a:buNone/>
+            </a:pPr>
+            <a:r>
+              <a:rPr lang="en-US" sz="1100" b="1" dirty="0">
+                <a:solidFill>
+                  <a:srgbClr val="E2703A"/>
+                </a:solidFill>
+                <a:latin typeface="Meiryo" pitchFamily="34" charset="0"/>
+                <a:ea typeface="Meiryo" pitchFamily="34" charset="-122"/>
+                <a:cs typeface="Meiryo" pitchFamily="34" charset="-120"/>
+              </a:rPr>
+              <a:t>本編の数ヶ月前から</a:t>
+            </a:r>
+            <a:endParaRPr lang="en-US" sz="1100" dirty="0"/>
+          </a:p>
+        </p:txBody>
+      </p:sp>
+      <p:sp>
+        <p:nvSpPr>
+          <p:cNvPr id="16" name="Text 14"/>
+          <p:cNvSpPr/>
+          <p:nvPr/>
+        </p:nvSpPr>
+        <p:spPr>
+          <a:xfrm>
+            <a:off x="6693408" y="3886200"/>
+            <a:ext cx="4809744" cy="1371600"/>
+          </a:xfrm>
+          <a:prstGeom prst="rect">
+            <a:avLst/>
+          </a:prstGeom>
+          <a:noFill/>
+          <a:ln/>
+        </p:spPr>
+        <p:txBody>
+          <a:bodyPr wrap="square" lIns="0" tIns="0" rIns="0" bIns="0" rtlCol="0" anchor="t"/>
+          <a:lstStyle/>
+          <a:p>
+            <a:pPr indent="0" marL="0">
+              <a:lnSpc>
+                <a:spcPts val="1800"/>
+              </a:lnSpc>
+              <a:buNone/>
+            </a:pPr>
+            <a:r>
+              <a:rPr lang="en-US" sz="1150" dirty="0">
+                <a:solidFill>
+                  <a:srgbClr val="1F2933"/>
+                </a:solidFill>
+                <a:latin typeface="Meiryo" pitchFamily="34" charset="0"/>
+                <a:ea typeface="Meiryo" pitchFamily="34" charset="-122"/>
+                <a:cs typeface="Meiryo" pitchFamily="34" charset="-120"/>
+              </a:rPr>
+              <a:t>初参加者が抱く「コミュニティのノリについていけるか」という不安を払拭するため、少人数の事前交流会をオンライン・オフラインで開催。CLSの楽しみ方と文脈を先に共有し、参加の心理的ハードルを下げる。</a:t>
+            </a:r>
+            <a:endParaRPr lang="en-US" sz="1150" dirty="0"/>
+          </a:p>
+        </p:txBody>
+      </p:sp>
+      <p:sp>
+        <p:nvSpPr>
+          <p:cNvPr id="23" name="Text 21"/>
+          <p:cNvSpPr/>
+          <p:nvPr/>
+        </p:nvSpPr>
+        <p:spPr>
+          <a:xfrm>
+            <a:off x="11155680" y="6291072"/>
+            <a:ext cx="548640" cy="320040"/>
+          </a:xfrm>
+          <a:prstGeom prst="rect">
+            <a:avLst/>
+          </a:prstGeom>
+          <a:noFill/>
+          <a:ln/>
+        </p:spPr>
+        <p:txBody>
+          <a:bodyPr wrap="square" lIns="0" tIns="0" rIns="0" bIns="0" rtlCol="0" anchor="ctr"/>
+          <a:lstStyle/>
+          <a:p>
+            <a:pPr algn="r" indent="0" marL="0">
+              <a:buNone/>
+            </a:pPr>
+            <a:r>
+              <a:rPr lang="en-US" sz="1000" dirty="0">
+                <a:solidFill>
+                  <a:srgbClr val="667384"/>
+                </a:solidFill>
+                <a:latin typeface="Meiryo" pitchFamily="34" charset="0"/>
+                <a:ea typeface="Meiryo" pitchFamily="34" charset="-122"/>
+                <a:cs typeface="Meiryo" pitchFamily="34" charset="-120"/>
+              </a:rPr>
+              <a:t>17</a:t>
+            </a:r>
+            <a:endParaRPr lang="en-US" sz="1000" dirty="0"/>
+          </a:p>
+        </p:txBody>
+      </p:sp>
+    </p:spTree>
+  </p:cSld>
+  <p:clrMapOvr>
+    <a:masterClrMapping/>
+  </p:clrMapOvr>
+</p:sld>
+</file>
+
+<file path=ppt/slides/slide18.xml><?xml version="1.0" encoding="utf-8"?>
 <p:sld xmlns:a="http://schemas.openxmlformats.org/drawingml/2006/main" xmlns:r="http://schemas.openxmlformats.org/officeDocument/2006/relationships" xmlns:p="http://schemas.openxmlformats.org/presentationml/2006/main">
   <p:cSld name="Slide 17">
     <p:bg>
@@ -8124,7 +8780,7 @@
                 <a:ea typeface="Meiryo" pitchFamily="34" charset="-122"/>
                 <a:cs typeface="Meiryo" pitchFamily="34" charset="-120"/>
               </a:rPr>
-              <a:t>運営リソースが3名に限定されている現状は、悲観すべきではない。別府という土地が持つ「誰もが服を脱ぎ、同じ湯に浸かる」圧倒的な受容性とフラットな文化を極限まで活かし、旅館での「合宿型・少人数制」という濃密なフォーマットへ昇華させることで、大規模開催では決して得られない深い心理的安全性と自己変容の機会を提供できる。</a:t>
+              <a:t>運営リソースが3名に限定されている現状は、悲観すべきではない。第0回の熱狂を生んだ「レンガホールでの本編＋懇親会」へ戦略的に原点回帰し、付帯イベントを削ぎ落として運営の持続可能性を担保する。その上で、PVMVを刻んだ名刺で一人ひとりの当事者を直接巻き込み、イベント後には次期運営候補を対象とした少人数の合宿でコアコミュニティの火種を次へ繋ぐ。</a:t>
             </a:r>
             <a:endParaRPr lang="en-US" sz="1350" dirty="0"/>
           </a:p>
@@ -8216,7 +8872,7 @@
 </p:sld>
 </file>
 
-<file path=ppt/slides/slide18.xml><?xml version="1.0" encoding="utf-8"?>
+<file path=ppt/slides/slide19.xml><?xml version="1.0" encoding="utf-8"?>
 <p:sld xmlns:a="http://schemas.openxmlformats.org/drawingml/2006/main" xmlns:r="http://schemas.openxmlformats.org/officeDocument/2006/relationships" xmlns:p="http://schemas.openxmlformats.org/presentationml/2006/main">
   <p:cSld name="Slide 18">
     <p:bg>
@@ -9405,909 +10061,6 @@
                 <a:cs typeface="Meiryo" pitchFamily="34" charset="-120"/>
               </a:rPr>
               <a:t>19</a:t>
-            </a:r>
-            <a:endParaRPr lang="en-US" sz="1000" dirty="0"/>
-          </a:p>
-        </p:txBody>
-      </p:sp>
-    </p:spTree>
-  </p:cSld>
-  <p:clrMapOvr>
-    <a:masterClrMapping/>
-  </p:clrMapOvr>
-</p:sld>
-</file>
-
-<file path=ppt/slides/slide19.xml><?xml version="1.0" encoding="utf-8"?>
-<p:sld xmlns:a="http://schemas.openxmlformats.org/drawingml/2006/main" xmlns:p="http://schemas.openxmlformats.org/presentationml/2006/main" xmlns:r="http://schemas.openxmlformats.org/officeDocument/2006/relationships">
-  <p:cSld>
-    <p:spTree>
-      <p:nvGrpSpPr>
-        <p:cNvPr id="1" name=""/>
-        <p:cNvGrpSpPr/>
-        <p:nvPr/>
-      </p:nvGrpSpPr>
-      <p:grpSpPr/>
-      <p:sp>
-        <p:nvSpPr>
-          <p:cNvPr id="2" name="Text 0"/>
-          <p:cNvSpPr/>
-          <p:nvPr/>
-        </p:nvSpPr>
-        <p:spPr>
-          <a:xfrm>
-            <a:off x="640080" y="201168"/>
-            <a:ext cx="10881360" cy="274320"/>
-          </a:xfrm>
-          <a:prstGeom prst="rect">
-            <a:avLst/>
-          </a:prstGeom>
-          <a:noFill/>
-          <a:ln/>
-        </p:spPr>
-        <p:txBody>
-          <a:bodyPr wrap="square" lIns="0" tIns="0" rIns="0" bIns="0" rtlCol="0" anchor="ctr"/>
-          <a:lstStyle/>
-          <a:p>
-            <a:pPr indent="0" marL="0">
-              <a:buNone/>
-            </a:pPr>
-            <a:r>
-              <a:rPr lang="en-US" sz="1150" b="1" spc="200" kern="0" dirty="0">
-                <a:solidFill>
-                  <a:srgbClr val="E2703A"/>
-                </a:solidFill>
-                <a:latin typeface="Meiryo" pitchFamily="34" charset="0"/>
-                <a:ea typeface="Meiryo" pitchFamily="34" charset="-122"/>
-                <a:cs typeface="Meiryo" pitchFamily="34" charset="-120"/>
-              </a:rPr>
-              <a:t>ACTION 03</a:t>
-            </a:r>
-            <a:endParaRPr lang="en-US" sz="1150" dirty="0"/>
-          </a:p>
-        </p:txBody>
-      </p:sp>
-      <p:sp>
-        <p:nvSpPr>
-          <p:cNvPr id="3" name="Text 1"/>
-          <p:cNvSpPr/>
-          <p:nvPr/>
-        </p:nvSpPr>
-        <p:spPr>
-          <a:xfrm>
-            <a:off x="640080" y="411480"/>
-            <a:ext cx="10881360" cy="822960"/>
-          </a:xfrm>
-          <a:prstGeom prst="rect">
-            <a:avLst/>
-          </a:prstGeom>
-          <a:noFill/>
-          <a:ln/>
-        </p:spPr>
-        <p:txBody>
-          <a:bodyPr wrap="square" lIns="0" tIns="0" rIns="0" bIns="0" rtlCol="0" anchor="ctr"/>
-          <a:lstStyle/>
-          <a:p>
-            <a:pPr algn="l" indent="0" marL="0">
-              <a:buNone/>
-            </a:pPr>
-            <a:r>
-              <a:rPr lang="en-US" sz="3000" b="1" dirty="0">
-                <a:solidFill>
-                  <a:srgbClr val="132A4A"/>
-                </a:solidFill>
-                <a:latin typeface="Meiryo" pitchFamily="34" charset="0"/>
-                <a:ea typeface="Meiryo" pitchFamily="34" charset="-122"/>
-                <a:cs typeface="Meiryo" pitchFamily="34" charset="-120"/>
-              </a:rPr>
-              <a:t>参加者は「面」で集め、「名指し」で巻き込む</a:t>
-            </a:r>
-            <a:endParaRPr lang="en-US" sz="3000" dirty="0"/>
-          </a:p>
-        </p:txBody>
-      </p:sp>
-      <p:sp>
-        <p:nvSpPr>
-          <p:cNvPr id="4" name="Text 2"/>
-          <p:cNvSpPr/>
-          <p:nvPr/>
-        </p:nvSpPr>
-        <p:spPr>
-          <a:xfrm>
-            <a:off x="640080" y="1298448"/>
-            <a:ext cx="10881360" cy="365760"/>
-          </a:xfrm>
-          <a:prstGeom prst="rect">
-            <a:avLst/>
-          </a:prstGeom>
-          <a:noFill/>
-          <a:ln/>
-        </p:spPr>
-        <p:txBody>
-          <a:bodyPr wrap="square" lIns="0" tIns="0" rIns="0" bIns="0" rtlCol="0" anchor="ctr"/>
-          <a:lstStyle/>
-          <a:p>
-            <a:pPr indent="0" marL="0">
-              <a:buNone/>
-            </a:pPr>
-            <a:r>
-              <a:rPr lang="en-US" sz="1250" dirty="0">
-                <a:solidFill>
-                  <a:srgbClr val="667384"/>
-                </a:solidFill>
-                <a:latin typeface="Meiryo" pitchFamily="34" charset="0"/>
-                <a:ea typeface="Meiryo" pitchFamily="34" charset="-122"/>
-                <a:cs typeface="Meiryo" pitchFamily="34" charset="-120"/>
-              </a:rPr>
-              <a:t>小規模・高単価な合宿型では、不特定多数へのマス広告ではなく、熱量の高い層へピンポイントでリーチし「当事者」として巻き込む。</a:t>
-            </a:r>
-            <a:endParaRPr lang="en-US" sz="1250" dirty="0"/>
-          </a:p>
-        </p:txBody>
-      </p:sp>
-      <p:sp>
-        <p:nvSpPr>
-          <p:cNvPr id="5" name="Shape 3"/>
-          <p:cNvSpPr/>
-          <p:nvPr/>
-        </p:nvSpPr>
-        <p:spPr>
-          <a:xfrm>
-            <a:off x="640080" y="1874520"/>
-            <a:ext cx="3566160" cy="3520440"/>
-          </a:xfrm>
-          <a:prstGeom prst="roundRect">
-            <a:avLst>
-              <a:gd name="adj" fmla="val 2078"/>
-            </a:avLst>
-          </a:prstGeom>
-          <a:solidFill>
-            <a:srgbClr val="F4F7FA"/>
-          </a:solidFill>
-          <a:ln w="9525">
-            <a:solidFill>
-              <a:srgbClr val="E3E9F0"/>
-            </a:solidFill>
-            <a:prstDash val="solid"/>
-          </a:ln>
-          <a:effectLst>
-            <a:outerShdw sx="100000" sy="100000" kx="0" ky="0" algn="bl" rotWithShape="0" blurRad="101600" dist="508" dir="5400000">
-              <a:srgbClr val="9AA7B5">
-                <a:alpha val="22000"/>
-              </a:srgbClr>
-            </a:outerShdw>
-          </a:effectLst>
-        </p:spPr>
-      </p:sp>
-      <p:sp>
-        <p:nvSpPr>
-          <p:cNvPr id="6" name="Shape 4"/>
-          <p:cNvSpPr/>
-          <p:nvPr/>
-        </p:nvSpPr>
-        <p:spPr>
-          <a:xfrm>
-            <a:off x="932688" y="2148840"/>
-            <a:ext cx="1691640" cy="310896"/>
-          </a:xfrm>
-          <a:prstGeom prst="roundRect">
-            <a:avLst>
-              <a:gd name="adj" fmla="val 50000"/>
-            </a:avLst>
-          </a:prstGeom>
-          <a:solidFill>
-            <a:srgbClr val="E2703A"/>
-          </a:solidFill>
-          <a:ln w="12700">
-            <a:solidFill>
-              <a:srgbClr val="333333"/>
-            </a:solidFill>
-            <a:prstDash val="solid"/>
-          </a:ln>
-        </p:spPr>
-      </p:sp>
-      <p:sp>
-        <p:nvSpPr>
-          <p:cNvPr id="7" name="Text 5"/>
-          <p:cNvSpPr/>
-          <p:nvPr/>
-        </p:nvSpPr>
-        <p:spPr>
-          <a:xfrm>
-            <a:off x="932688" y="2148840"/>
-            <a:ext cx="1691640" cy="310896"/>
-          </a:xfrm>
-          <a:prstGeom prst="rect">
-            <a:avLst/>
-          </a:prstGeom>
-          <a:noFill/>
-          <a:ln/>
-        </p:spPr>
-        <p:txBody>
-          <a:bodyPr wrap="square" lIns="0" tIns="0" rIns="0" bIns="0" rtlCol="0" anchor="ctr"/>
-          <a:lstStyle/>
-          <a:p>
-            <a:pPr algn="ctr" indent="0" marL="0">
-              <a:buNone/>
-            </a:pPr>
-            <a:r>
-              <a:rPr lang="en-US" sz="950" b="1" dirty="0">
-                <a:solidFill>
-                  <a:srgbClr val="FFFFFF"/>
-                </a:solidFill>
-                <a:latin typeface="Meiryo" pitchFamily="34" charset="0"/>
-                <a:ea typeface="Meiryo" pitchFamily="34" charset="-122"/>
-                <a:cs typeface="Meiryo" pitchFamily="34" charset="-120"/>
-              </a:rPr>
-              <a:t>事前熱狂</a:t>
-            </a:r>
-            <a:endParaRPr lang="en-US" sz="950" dirty="0"/>
-          </a:p>
-        </p:txBody>
-      </p:sp>
-      <p:sp>
-        <p:nvSpPr>
-          <p:cNvPr id="8" name="Text 6"/>
-          <p:cNvSpPr/>
-          <p:nvPr/>
-        </p:nvSpPr>
-        <p:spPr>
-          <a:xfrm>
-            <a:off x="932688" y="2606040"/>
-            <a:ext cx="2980944" cy="914400"/>
-          </a:xfrm>
-          <a:prstGeom prst="rect">
-            <a:avLst/>
-          </a:prstGeom>
-          <a:noFill/>
-          <a:ln/>
-        </p:spPr>
-        <p:txBody>
-          <a:bodyPr wrap="square" lIns="0" tIns="0" rIns="0" bIns="0" rtlCol="0" anchor="t"/>
-          <a:lstStyle/>
-          <a:p>
-            <a:pPr indent="0" marL="0">
-              <a:lnSpc>
-                <a:spcPts val="2700"/>
-              </a:lnSpc>
-              <a:buNone/>
-            </a:pPr>
-            <a:r>
-              <a:rPr lang="en-US" sz="2000" b="1" dirty="0">
-                <a:solidFill>
-                  <a:srgbClr val="132A4A"/>
-                </a:solidFill>
-                <a:latin typeface="Meiryo" pitchFamily="34" charset="0"/>
-                <a:ea typeface="Meiryo" pitchFamily="34" charset="-122"/>
-                <a:cs typeface="Meiryo" pitchFamily="34" charset="-120"/>
-              </a:rPr>
-              <a:t>プレヒート</a:t>
-            </a:r>
-            <a:endParaRPr lang="en-US" sz="2000" dirty="0"/>
-          </a:p>
-          <a:p>
-            <a:pPr indent="0" marL="0">
-              <a:lnSpc>
-                <a:spcPts val="2700"/>
-              </a:lnSpc>
-              <a:buNone/>
-            </a:pPr>
-            <a:r>
-              <a:rPr lang="en-US" sz="2000" b="1" dirty="0">
-                <a:solidFill>
-                  <a:srgbClr val="132A4A"/>
-                </a:solidFill>
-                <a:latin typeface="Meiryo" pitchFamily="34" charset="0"/>
-                <a:ea typeface="Meiryo" pitchFamily="34" charset="-122"/>
-                <a:cs typeface="Meiryo" pitchFamily="34" charset="-120"/>
-              </a:rPr>
-              <a:t>イベント</a:t>
-            </a:r>
-            <a:endParaRPr lang="en-US" sz="2000" dirty="0"/>
-          </a:p>
-        </p:txBody>
-      </p:sp>
-      <p:sp>
-        <p:nvSpPr>
-          <p:cNvPr id="9" name="Text 7"/>
-          <p:cNvSpPr/>
-          <p:nvPr/>
-        </p:nvSpPr>
-        <p:spPr>
-          <a:xfrm>
-            <a:off x="932688" y="3566160"/>
-            <a:ext cx="2980944" cy="274320"/>
-          </a:xfrm>
-          <a:prstGeom prst="rect">
-            <a:avLst/>
-          </a:prstGeom>
-          <a:noFill/>
-          <a:ln/>
-        </p:spPr>
-        <p:txBody>
-          <a:bodyPr wrap="square" lIns="0" tIns="0" rIns="0" bIns="0" rtlCol="0" anchor="ctr"/>
-          <a:lstStyle/>
-          <a:p>
-            <a:pPr indent="0" marL="0">
-              <a:buNone/>
-            </a:pPr>
-            <a:r>
-              <a:rPr lang="en-US" sz="1100" b="1" dirty="0">
-                <a:solidFill>
-                  <a:srgbClr val="E2703A"/>
-                </a:solidFill>
-                <a:latin typeface="Meiryo" pitchFamily="34" charset="0"/>
-                <a:ea typeface="Meiryo" pitchFamily="34" charset="-122"/>
-                <a:cs typeface="Meiryo" pitchFamily="34" charset="-120"/>
-              </a:rPr>
-              <a:t>本編の数ヶ月前から</a:t>
-            </a:r>
-            <a:endParaRPr lang="en-US" sz="1100" dirty="0"/>
-          </a:p>
-        </p:txBody>
-      </p:sp>
-      <p:sp>
-        <p:nvSpPr>
-          <p:cNvPr id="10" name="Text 8"/>
-          <p:cNvSpPr/>
-          <p:nvPr/>
-        </p:nvSpPr>
-        <p:spPr>
-          <a:xfrm>
-            <a:off x="932688" y="3886200"/>
-            <a:ext cx="2980944" cy="1371600"/>
-          </a:xfrm>
-          <a:prstGeom prst="rect">
-            <a:avLst/>
-          </a:prstGeom>
-          <a:noFill/>
-          <a:ln/>
-        </p:spPr>
-        <p:txBody>
-          <a:bodyPr wrap="square" lIns="0" tIns="0" rIns="0" bIns="0" rtlCol="0" anchor="t"/>
-          <a:lstStyle/>
-          <a:p>
-            <a:pPr indent="0" marL="0">
-              <a:lnSpc>
-                <a:spcPts val="1800"/>
-              </a:lnSpc>
-              <a:buNone/>
-            </a:pPr>
-            <a:r>
-              <a:rPr lang="en-US" sz="1150" dirty="0">
-                <a:solidFill>
-                  <a:srgbClr val="1F2933"/>
-                </a:solidFill>
-                <a:latin typeface="Meiryo" pitchFamily="34" charset="0"/>
-                <a:ea typeface="Meiryo" pitchFamily="34" charset="-122"/>
-                <a:cs typeface="Meiryo" pitchFamily="34" charset="-120"/>
-              </a:rPr>
-              <a:t>初参加者が抱く「コミュニティのノリについていけるか」という不安を払拭するため、少人数の事前交流会をオンライン・オフラインで開催。CLSの楽しみ方と文脈を先に共有し、参加の心理的ハードルを下げる。</a:t>
-            </a:r>
-            <a:endParaRPr lang="en-US" sz="1150" dirty="0"/>
-          </a:p>
-        </p:txBody>
-      </p:sp>
-      <p:sp>
-        <p:nvSpPr>
-          <p:cNvPr id="11" name="Shape 9"/>
-          <p:cNvSpPr/>
-          <p:nvPr/>
-        </p:nvSpPr>
-        <p:spPr>
-          <a:xfrm>
-            <a:off x="4480560" y="1874520"/>
-            <a:ext cx="3566160" cy="3520440"/>
-          </a:xfrm>
-          <a:prstGeom prst="roundRect">
-            <a:avLst>
-              <a:gd name="adj" fmla="val 2078"/>
-            </a:avLst>
-          </a:prstGeom>
-          <a:solidFill>
-            <a:srgbClr val="F4F7FA"/>
-          </a:solidFill>
-          <a:ln w="9525">
-            <a:solidFill>
-              <a:srgbClr val="E3E9F0"/>
-            </a:solidFill>
-            <a:prstDash val="solid"/>
-          </a:ln>
-          <a:effectLst>
-            <a:outerShdw sx="100000" sy="100000" kx="0" ky="0" algn="bl" rotWithShape="0" blurRad="101600" dist="508" dir="5400000">
-              <a:srgbClr val="9AA7B5">
-                <a:alpha val="22000"/>
-              </a:srgbClr>
-            </a:outerShdw>
-          </a:effectLst>
-        </p:spPr>
-      </p:sp>
-      <p:sp>
-        <p:nvSpPr>
-          <p:cNvPr id="12" name="Shape 10"/>
-          <p:cNvSpPr/>
-          <p:nvPr/>
-        </p:nvSpPr>
-        <p:spPr>
-          <a:xfrm>
-            <a:off x="4773168" y="2148840"/>
-            <a:ext cx="1691640" cy="310896"/>
-          </a:xfrm>
-          <a:prstGeom prst="roundRect">
-            <a:avLst>
-              <a:gd name="adj" fmla="val 50000"/>
-            </a:avLst>
-          </a:prstGeom>
-          <a:solidFill>
-            <a:srgbClr val="132A4A"/>
-          </a:solidFill>
-          <a:ln w="12700">
-            <a:solidFill>
-              <a:srgbClr val="333333"/>
-            </a:solidFill>
-            <a:prstDash val="solid"/>
-          </a:ln>
-        </p:spPr>
-      </p:sp>
-      <p:sp>
-        <p:nvSpPr>
-          <p:cNvPr id="13" name="Text 11"/>
-          <p:cNvSpPr/>
-          <p:nvPr/>
-        </p:nvSpPr>
-        <p:spPr>
-          <a:xfrm>
-            <a:off x="4773168" y="2148840"/>
-            <a:ext cx="1691640" cy="310896"/>
-          </a:xfrm>
-          <a:prstGeom prst="rect">
-            <a:avLst/>
-          </a:prstGeom>
-          <a:noFill/>
-          <a:ln/>
-        </p:spPr>
-        <p:txBody>
-          <a:bodyPr wrap="square" lIns="0" tIns="0" rIns="0" bIns="0" rtlCol="0" anchor="ctr"/>
-          <a:lstStyle/>
-          <a:p>
-            <a:pPr algn="ctr" indent="0" marL="0">
-              <a:buNone/>
-            </a:pPr>
-            <a:r>
-              <a:rPr lang="en-US" sz="950" b="1" dirty="0">
-                <a:solidFill>
-                  <a:srgbClr val="FFFFFF"/>
-                </a:solidFill>
-                <a:latin typeface="Meiryo" pitchFamily="34" charset="0"/>
-                <a:ea typeface="Meiryo" pitchFamily="34" charset="-122"/>
-                <a:cs typeface="Meiryo" pitchFamily="34" charset="-120"/>
-              </a:rPr>
-              <a:t>面で繋ぐ</a:t>
-            </a:r>
-            <a:endParaRPr lang="en-US" sz="950" dirty="0"/>
-          </a:p>
-        </p:txBody>
-      </p:sp>
-      <p:sp>
-        <p:nvSpPr>
-          <p:cNvPr id="14" name="Text 12"/>
-          <p:cNvSpPr/>
-          <p:nvPr/>
-        </p:nvSpPr>
-        <p:spPr>
-          <a:xfrm>
-            <a:off x="4773168" y="2606040"/>
-            <a:ext cx="2980944" cy="914400"/>
-          </a:xfrm>
-          <a:prstGeom prst="rect">
-            <a:avLst/>
-          </a:prstGeom>
-          <a:noFill/>
-          <a:ln/>
-        </p:spPr>
-        <p:txBody>
-          <a:bodyPr wrap="square" lIns="0" tIns="0" rIns="0" bIns="0" rtlCol="0" anchor="t"/>
-          <a:lstStyle/>
-          <a:p>
-            <a:pPr indent="0" marL="0">
-              <a:lnSpc>
-                <a:spcPts val="2700"/>
-              </a:lnSpc>
-              <a:buNone/>
-            </a:pPr>
-            <a:r>
-              <a:rPr lang="en-US" sz="2000" b="1" dirty="0">
-                <a:solidFill>
-                  <a:srgbClr val="132A4A"/>
-                </a:solidFill>
-                <a:latin typeface="Meiryo" pitchFamily="34" charset="0"/>
-                <a:ea typeface="Meiryo" pitchFamily="34" charset="-122"/>
-                <a:cs typeface="Meiryo" pitchFamily="34" charset="-120"/>
-              </a:rPr>
-              <a:t>既存コミュニティ</a:t>
-            </a:r>
-            <a:endParaRPr lang="en-US" sz="2000" dirty="0"/>
-          </a:p>
-          <a:p>
-            <a:pPr indent="0" marL="0">
-              <a:lnSpc>
-                <a:spcPts val="2700"/>
-              </a:lnSpc>
-              <a:buNone/>
-            </a:pPr>
-            <a:r>
-              <a:rPr lang="en-US" sz="2000" b="1" dirty="0">
-                <a:solidFill>
-                  <a:srgbClr val="132A4A"/>
-                </a:solidFill>
-                <a:latin typeface="Meiryo" pitchFamily="34" charset="0"/>
-                <a:ea typeface="Meiryo" pitchFamily="34" charset="-122"/>
-                <a:cs typeface="Meiryo" pitchFamily="34" charset="-120"/>
-              </a:rPr>
-              <a:t>への「出稽古」</a:t>
-            </a:r>
-            <a:endParaRPr lang="en-US" sz="2000" dirty="0"/>
-          </a:p>
-        </p:txBody>
-      </p:sp>
-      <p:sp>
-        <p:nvSpPr>
-          <p:cNvPr id="15" name="Text 13"/>
-          <p:cNvSpPr/>
-          <p:nvPr/>
-        </p:nvSpPr>
-        <p:spPr>
-          <a:xfrm>
-            <a:off x="4773168" y="3566160"/>
-            <a:ext cx="2980944" cy="274320"/>
-          </a:xfrm>
-          <a:prstGeom prst="rect">
-            <a:avLst/>
-          </a:prstGeom>
-          <a:noFill/>
-          <a:ln/>
-        </p:spPr>
-        <p:txBody>
-          <a:bodyPr wrap="square" lIns="0" tIns="0" rIns="0" bIns="0" rtlCol="0" anchor="ctr"/>
-          <a:lstStyle/>
-          <a:p>
-            <a:pPr indent="0" marL="0">
-              <a:buNone/>
-            </a:pPr>
-            <a:r>
-              <a:rPr lang="en-US" sz="1100" b="1" dirty="0">
-                <a:solidFill>
-                  <a:srgbClr val="E2703A"/>
-                </a:solidFill>
-                <a:latin typeface="Meiryo" pitchFamily="34" charset="0"/>
-                <a:ea typeface="Meiryo" pitchFamily="34" charset="-122"/>
-                <a:cs typeface="Meiryo" pitchFamily="34" charset="-120"/>
-              </a:rPr>
-              <a:t>運営メンバー自らが足を運ぶ</a:t>
-            </a:r>
-            <a:endParaRPr lang="en-US" sz="1100" dirty="0"/>
-          </a:p>
-        </p:txBody>
-      </p:sp>
-      <p:sp>
-        <p:nvSpPr>
-          <p:cNvPr id="16" name="Text 14"/>
-          <p:cNvSpPr/>
-          <p:nvPr/>
-        </p:nvSpPr>
-        <p:spPr>
-          <a:xfrm>
-            <a:off x="4773168" y="3886200"/>
-            <a:ext cx="2980944" cy="1371600"/>
-          </a:xfrm>
-          <a:prstGeom prst="rect">
-            <a:avLst/>
-          </a:prstGeom>
-          <a:noFill/>
-          <a:ln/>
-        </p:spPr>
-        <p:txBody>
-          <a:bodyPr wrap="square" lIns="0" tIns="0" rIns="0" bIns="0" rtlCol="0" anchor="t"/>
-          <a:lstStyle/>
-          <a:p>
-            <a:pPr indent="0" marL="0">
-              <a:lnSpc>
-                <a:spcPts val="1800"/>
-              </a:lnSpc>
-              <a:buNone/>
-            </a:pPr>
-            <a:r>
-              <a:rPr lang="en-US" sz="1150" dirty="0">
-                <a:solidFill>
-                  <a:srgbClr val="1F2933"/>
-                </a:solidFill>
-                <a:latin typeface="Meiryo" pitchFamily="34" charset="0"/>
-                <a:ea typeface="Meiryo" pitchFamily="34" charset="-122"/>
-                <a:cs typeface="Meiryo" pitchFamily="34" charset="-120"/>
-              </a:rPr>
-              <a:t>大分・別府エリアの他コミュニティ（技術系勉強会、ITユーザグループ、BEPPU FAN TOWN など）へ運営自らが足を運び、直接参加を呼びかける。点在するコミュニティをCLSというハブへ接続する。</a:t>
-            </a:r>
-            <a:endParaRPr lang="en-US" sz="1150" dirty="0"/>
-          </a:p>
-        </p:txBody>
-      </p:sp>
-      <p:sp>
-        <p:nvSpPr>
-          <p:cNvPr id="17" name="Shape 15"/>
-          <p:cNvSpPr/>
-          <p:nvPr/>
-        </p:nvSpPr>
-        <p:spPr>
-          <a:xfrm>
-            <a:off x="8321040" y="1874520"/>
-            <a:ext cx="3566160" cy="3520440"/>
-          </a:xfrm>
-          <a:prstGeom prst="roundRect">
-            <a:avLst>
-              <a:gd name="adj" fmla="val 2078"/>
-            </a:avLst>
-          </a:prstGeom>
-          <a:solidFill>
-            <a:srgbClr val="F4F7FA"/>
-          </a:solidFill>
-          <a:ln w="9525">
-            <a:solidFill>
-              <a:srgbClr val="E3E9F0"/>
-            </a:solidFill>
-            <a:prstDash val="solid"/>
-          </a:ln>
-          <a:effectLst>
-            <a:outerShdw sx="100000" sy="100000" kx="0" ky="0" algn="bl" rotWithShape="0" blurRad="101600" dist="508" dir="5400000">
-              <a:srgbClr val="9AA7B5">
-                <a:alpha val="22000"/>
-              </a:srgbClr>
-            </a:outerShdw>
-          </a:effectLst>
-        </p:spPr>
-      </p:sp>
-      <p:sp>
-        <p:nvSpPr>
-          <p:cNvPr id="18" name="Shape 16"/>
-          <p:cNvSpPr/>
-          <p:nvPr/>
-        </p:nvSpPr>
-        <p:spPr>
-          <a:xfrm>
-            <a:off x="8613648" y="2148840"/>
-            <a:ext cx="1691640" cy="310896"/>
-          </a:xfrm>
-          <a:prstGeom prst="roundRect">
-            <a:avLst>
-              <a:gd name="adj" fmla="val 50000"/>
-            </a:avLst>
-          </a:prstGeom>
-          <a:solidFill>
-            <a:srgbClr val="1E3E6B"/>
-          </a:solidFill>
-          <a:ln w="12700">
-            <a:solidFill>
-              <a:srgbClr val="333333"/>
-            </a:solidFill>
-            <a:prstDash val="solid"/>
-          </a:ln>
-        </p:spPr>
-      </p:sp>
-      <p:sp>
-        <p:nvSpPr>
-          <p:cNvPr id="19" name="Text 17"/>
-          <p:cNvSpPr/>
-          <p:nvPr/>
-        </p:nvSpPr>
-        <p:spPr>
-          <a:xfrm>
-            <a:off x="8613648" y="2148840"/>
-            <a:ext cx="1691640" cy="310896"/>
-          </a:xfrm>
-          <a:prstGeom prst="rect">
-            <a:avLst/>
-          </a:prstGeom>
-          <a:noFill/>
-          <a:ln/>
-        </p:spPr>
-        <p:txBody>
-          <a:bodyPr wrap="square" lIns="0" tIns="0" rIns="0" bIns="0" rtlCol="0" anchor="ctr"/>
-          <a:lstStyle/>
-          <a:p>
-            <a:pPr algn="ctr" indent="0" marL="0">
-              <a:buNone/>
-            </a:pPr>
-            <a:r>
-              <a:rPr lang="en-US" sz="950" b="1" dirty="0">
-                <a:solidFill>
-                  <a:srgbClr val="FFFFFF"/>
-                </a:solidFill>
-                <a:latin typeface="Meiryo" pitchFamily="34" charset="0"/>
-                <a:ea typeface="Meiryo" pitchFamily="34" charset="-122"/>
-                <a:cs typeface="Meiryo" pitchFamily="34" charset="-120"/>
-              </a:rPr>
-              <a:t>連鎖を生む</a:t>
-            </a:r>
-            <a:endParaRPr lang="en-US" sz="950" dirty="0"/>
-          </a:p>
-        </p:txBody>
-      </p:sp>
-      <p:sp>
-        <p:nvSpPr>
-          <p:cNvPr id="20" name="Text 18"/>
-          <p:cNvSpPr/>
-          <p:nvPr/>
-        </p:nvSpPr>
-        <p:spPr>
-          <a:xfrm>
-            <a:off x="8613648" y="2606040"/>
-            <a:ext cx="2980944" cy="914400"/>
-          </a:xfrm>
-          <a:prstGeom prst="rect">
-            <a:avLst/>
-          </a:prstGeom>
-          <a:noFill/>
-          <a:ln/>
-        </p:spPr>
-        <p:txBody>
-          <a:bodyPr wrap="square" lIns="0" tIns="0" rIns="0" bIns="0" rtlCol="0" anchor="t"/>
-          <a:lstStyle/>
-          <a:p>
-            <a:pPr indent="0" marL="0">
-              <a:lnSpc>
-                <a:spcPts val="2700"/>
-              </a:lnSpc>
-              <a:buNone/>
-            </a:pPr>
-            <a:r>
-              <a:rPr lang="en-US" sz="2000" b="1" dirty="0">
-                <a:solidFill>
-                  <a:srgbClr val="132A4A"/>
-                </a:solidFill>
-                <a:latin typeface="Meiryo" pitchFamily="34" charset="0"/>
-                <a:ea typeface="Meiryo" pitchFamily="34" charset="-122"/>
-                <a:cs typeface="Meiryo" pitchFamily="34" charset="-120"/>
-              </a:rPr>
-              <a:t>「名指し」の</a:t>
-            </a:r>
-            <a:endParaRPr lang="en-US" sz="2000" dirty="0"/>
-          </a:p>
-          <a:p>
-            <a:pPr indent="0" marL="0">
-              <a:lnSpc>
-                <a:spcPts val="2700"/>
-              </a:lnSpc>
-              <a:buNone/>
-            </a:pPr>
-            <a:r>
-              <a:rPr lang="en-US" sz="2000" b="1" dirty="0">
-                <a:solidFill>
-                  <a:srgbClr val="132A4A"/>
-                </a:solidFill>
-                <a:latin typeface="Meiryo" pitchFamily="34" charset="0"/>
-                <a:ea typeface="Meiryo" pitchFamily="34" charset="-122"/>
-                <a:cs typeface="Meiryo" pitchFamily="34" charset="-120"/>
-              </a:rPr>
-              <a:t>巻き込み</a:t>
-            </a:r>
-            <a:endParaRPr lang="en-US" sz="2000" dirty="0"/>
-          </a:p>
-        </p:txBody>
-      </p:sp>
-      <p:sp>
-        <p:nvSpPr>
-          <p:cNvPr id="21" name="Text 19"/>
-          <p:cNvSpPr/>
-          <p:nvPr/>
-        </p:nvSpPr>
-        <p:spPr>
-          <a:xfrm>
-            <a:off x="8613648" y="3566160"/>
-            <a:ext cx="2980944" cy="274320"/>
-          </a:xfrm>
-          <a:prstGeom prst="rect">
-            <a:avLst/>
-          </a:prstGeom>
-          <a:noFill/>
-          <a:ln/>
-        </p:spPr>
-        <p:txBody>
-          <a:bodyPr wrap="square" lIns="0" tIns="0" rIns="0" bIns="0" rtlCol="0" anchor="ctr"/>
-          <a:lstStyle/>
-          <a:p>
-            <a:pPr indent="0" marL="0">
-              <a:buNone/>
-            </a:pPr>
-            <a:r>
-              <a:rPr lang="en-US" sz="1100" b="1" dirty="0">
-                <a:solidFill>
-                  <a:srgbClr val="E2703A"/>
-                </a:solidFill>
-                <a:latin typeface="Meiryo" pitchFamily="34" charset="0"/>
-                <a:ea typeface="Meiryo" pitchFamily="34" charset="-122"/>
-                <a:cs typeface="Meiryo" pitchFamily="34" charset="-120"/>
-              </a:rPr>
-              <a:t>信頼ベースの個別声かけ</a:t>
-            </a:r>
-            <a:endParaRPr lang="en-US" sz="1100" dirty="0"/>
-          </a:p>
-        </p:txBody>
-      </p:sp>
-      <p:sp>
-        <p:nvSpPr>
-          <p:cNvPr id="22" name="Text 20"/>
-          <p:cNvSpPr/>
-          <p:nvPr/>
-        </p:nvSpPr>
-        <p:spPr>
-          <a:xfrm>
-            <a:off x="8613648" y="3886200"/>
-            <a:ext cx="2980944" cy="1371600"/>
-          </a:xfrm>
-          <a:prstGeom prst="rect">
-            <a:avLst/>
-          </a:prstGeom>
-          <a:noFill/>
-          <a:ln/>
-        </p:spPr>
-        <p:txBody>
-          <a:bodyPr wrap="square" lIns="0" tIns="0" rIns="0" bIns="0" rtlCol="0" anchor="t"/>
-          <a:lstStyle/>
-          <a:p>
-            <a:pPr indent="0" marL="0">
-              <a:lnSpc>
-                <a:spcPts val="1800"/>
-              </a:lnSpc>
-              <a:buNone/>
-            </a:pPr>
-            <a:r>
-              <a:rPr lang="en-US" sz="1150" dirty="0">
-                <a:solidFill>
-                  <a:srgbClr val="1F2933"/>
-                </a:solidFill>
-                <a:latin typeface="Meiryo" pitchFamily="34" charset="0"/>
-                <a:ea typeface="Meiryo" pitchFamily="34" charset="-122"/>
-                <a:cs typeface="Meiryo" pitchFamily="34" charset="-120"/>
-              </a:rPr>
-              <a:t>熱量の高い参加者を集める最強の手法は、信頼関係に基づく個別の声かけ。「あなたにこそ来てほしい」と直接伝え、「はい、喜んで」と応じてもらう連鎖を生み、コアな参加者を着実に獲得する。</a:t>
-            </a:r>
-            <a:endParaRPr lang="en-US" sz="1150" dirty="0"/>
-          </a:p>
-        </p:txBody>
-      </p:sp>
-      <p:sp>
-        <p:nvSpPr>
-          <p:cNvPr id="23" name="Text 21"/>
-          <p:cNvSpPr/>
-          <p:nvPr/>
-        </p:nvSpPr>
-        <p:spPr>
-          <a:xfrm>
-            <a:off x="11155680" y="6291072"/>
-            <a:ext cx="548640" cy="320040"/>
-          </a:xfrm>
-          <a:prstGeom prst="rect">
-            <a:avLst/>
-          </a:prstGeom>
-          <a:noFill/>
-          <a:ln/>
-        </p:spPr>
-        <p:txBody>
-          <a:bodyPr wrap="square" lIns="0" tIns="0" rIns="0" bIns="0" rtlCol="0" anchor="ctr"/>
-          <a:lstStyle/>
-          <a:p>
-            <a:pPr algn="r" indent="0" marL="0">
-              <a:buNone/>
-            </a:pPr>
-            <a:r>
-              <a:rPr lang="en-US" sz="1000" dirty="0">
-                <a:solidFill>
-                  <a:srgbClr val="667384"/>
-                </a:solidFill>
-                <a:latin typeface="Meiryo" pitchFamily="34" charset="0"/>
-                <a:ea typeface="Meiryo" pitchFamily="34" charset="-122"/>
-                <a:cs typeface="Meiryo" pitchFamily="34" charset="-120"/>
-              </a:rPr>
-              <a:t>17</a:t>
             </a:r>
             <a:endParaRPr lang="en-US" sz="1000" dirty="0"/>
           </a:p>
@@ -11140,7 +10893,7 @@
                 <a:ea typeface="Meiryo" pitchFamily="34" charset="-122"/>
                 <a:cs typeface="Meiryo" pitchFamily="34" charset="-120"/>
               </a:rPr>
-              <a:t>合宿型・小規模開催の優位性</a:t>
+              <a:t>第2回の戦略的フォーマット</a:t>
             </a:r>
             <a:endParaRPr lang="en-US" sz="1150" dirty="0"/>
           </a:p>
@@ -11432,7 +11185,7 @@
                 <a:ea typeface="Meiryo" pitchFamily="34" charset="-122"/>
                 <a:cs typeface="Meiryo" pitchFamily="34" charset="-120"/>
               </a:rPr>
-              <a:t>運営勧誘・協賛モデル・参加者リーチ</a:t>
+              <a:t>PVMV名刺・協賛モデル・参加者リーチ</a:t>
             </a:r>
             <a:endParaRPr lang="en-US" sz="1150" dirty="0"/>
           </a:p>
@@ -11917,7 +11670,7 @@
                 <a:ea typeface="Meiryo" pitchFamily="34" charset="-122"/>
                 <a:cs typeface="Meiryo" pitchFamily="34" charset="-120"/>
               </a:rPr>
-              <a:t>開催は2027年1〜2月想定</a:t>
+              <a:t>開催は2027年1月23日（土）</a:t>
             </a:r>
             <a:endParaRPr lang="en-US" sz="1350" dirty="0"/>
           </a:p>
@@ -11956,7 +11709,7 @@
                 <a:ea typeface="Meiryo" pitchFamily="34" charset="-122"/>
                 <a:cs typeface="Meiryo" pitchFamily="34" charset="-120"/>
               </a:rPr>
-              <a:t>別府／大分市周辺</a:t>
+              <a:t>別府レンガホール2階（第0回と同会場）</a:t>
             </a:r>
             <a:endParaRPr lang="en-US" sz="1150" dirty="0"/>
           </a:p>
@@ -12211,7 +11964,7 @@
                 <a:ea typeface="Meiryo" pitchFamily="34" charset="-122"/>
                 <a:cs typeface="Meiryo" pitchFamily="34" charset="-120"/>
               </a:rPr>
-              <a:t>地域を本気で良くしたい「地元の挑戦者」と、全国で活躍する「外の専門家」が混ざり合い、新しいプロジェクトを生み出す実践型の合宿イベント。</a:t>
+              <a:t>地域を本気で良くしたい「地元の挑戦者」と、全国で活躍する「外の専門家」が混ざり合い、新しいプロジェクトを生み出す実践型のイベント。</a:t>
             </a:r>
             <a:endParaRPr lang="en-US" sz="2400" dirty="0"/>
           </a:p>
@@ -16685,7 +16438,7 @@
                 <a:ea typeface="Meiryo" pitchFamily="34" charset="-122"/>
                 <a:cs typeface="Meiryo" pitchFamily="34" charset="-120"/>
               </a:rPr>
-              <a:t>別府・旅館での「合宿型開催」が生む3つのメリット</a:t>
+              <a:t>「レンガホールでの原点回帰」と「事後合宿」の二段構え</a:t>
             </a:r>
             <a:endParaRPr lang="en-US" sz="3000" dirty="0"/>
           </a:p>
@@ -16724,7 +16477,7 @@
                 <a:ea typeface="Meiryo" pitchFamily="34" charset="-122"/>
                 <a:cs typeface="Meiryo" pitchFamily="34" charset="-120"/>
               </a:rPr>
-              <a:t>大規模ホールでの講演スタイルを捨て、数十名規模の旅館貸し切りによるリトリート型を採用する。</a:t>
+              <a:t>2027年1月23日（土）、会場は第0回と同じ別府レンガホール2階。付帯イベントを削ぎ落とし、本編と懇親会にリソースを全集中させる。</a:t>
             </a:r>
             <a:endParaRPr lang="en-US" sz="1250" dirty="0"/>
           </a:p>
@@ -16836,7 +16589,7 @@
                 <a:ea typeface="Meiryo" pitchFamily="34" charset="-122"/>
                 <a:cs typeface="Meiryo" pitchFamily="34" charset="-120"/>
               </a:rPr>
-              <a:t>運営コストの劇的な削減</a:t>
+              <a:t>本編＋懇親会に集中</a:t>
             </a:r>
             <a:endParaRPr lang="en-US" sz="1600" dirty="0"/>
           </a:p>
@@ -16878,7 +16631,7 @@
                 <a:ea typeface="Meiryo" pitchFamily="34" charset="-122"/>
                 <a:cs typeface="Meiryo" pitchFamily="34" charset="-120"/>
               </a:rPr>
-              <a:t>会場設営、移動手配、複数店舗での懇親会予約といったロジスティクスが「旅館という一つの閉鎖空間」に集約される。3名体制でも十分にコントロール可能。</a:t>
+              <a:t>ワーケーション、前夜祭、大人の遠足といった付帯イベントは今回一切行わない。第0回フォーマットへの原点回帰により、3名体制でも十分にコントロール可能。</a:t>
             </a:r>
             <a:endParaRPr lang="en-US" sz="1200" dirty="0"/>
           </a:p>
@@ -16990,7 +16743,7 @@
                 <a:ea typeface="Meiryo" pitchFamily="34" charset="-122"/>
                 <a:cs typeface="Meiryo" pitchFamily="34" charset="-120"/>
               </a:rPr>
-              <a:t>逃げ場のない濃密な対話</a:t>
+              <a:t>会場はレンガホール2階</a:t>
             </a:r>
             <a:endParaRPr lang="en-US" sz="1600" dirty="0"/>
           </a:p>
@@ -17032,7 +16785,7 @@
                 <a:ea typeface="Meiryo" pitchFamily="34" charset="-122"/>
                 <a:cs typeface="Meiryo" pitchFamily="34" charset="-120"/>
               </a:rPr>
-              <a:t>同じ屋根の下で寝食を共にし、深夜まで議論を交わし、翌朝一緒に温泉に入る。高知の「ワーケーションと本編の融合」を、わずか1泊2日のパッケージで実現できる。</a:t>
+              <a:t>B-biz LINKが入居する昭和初期建設の登録有形文化財。会場費を無料に抑えつつ、独特の非日常空間をそのまま活用できる。</a:t>
             </a:r>
             <a:endParaRPr lang="en-US" sz="1200" dirty="0"/>
           </a:p>
@@ -17144,7 +16897,7 @@
                 <a:ea typeface="Meiryo" pitchFamily="34" charset="-122"/>
                 <a:cs typeface="Meiryo" pitchFamily="34" charset="-120"/>
               </a:rPr>
-              <a:t>プレミアム感による単価向上</a:t>
+              <a:t>事後の少人数合宿</a:t>
             </a:r>
             <a:endParaRPr lang="en-US" sz="1600" dirty="0"/>
           </a:p>
@@ -17186,7 +16939,7 @@
                 <a:ea typeface="Meiryo" pitchFamily="34" charset="-122"/>
                 <a:cs typeface="Meiryo" pitchFamily="34" charset="-120"/>
               </a:rPr>
-              <a:t>小規模であることを「限定性」と位置づけ、参加費・協賛費の単価を上げる。少ない集客でも損益分岐点を超える強靭な財務モデルを構築できる。</a:t>
+              <a:t>「合宿」の要素は後日へ。参加者の中から次回運営に巻き込めそうな数名だけを対象に極少人数で実施し、次期コアメンバーとの強固な信頼関係を築く。</a:t>
             </a:r>
             <a:endParaRPr lang="en-US" sz="1200" dirty="0"/>
           </a:p>

--- a/docs/meetings/20260816/CLS別府第2回企画立案.pptx
+++ b/docs/meetings/20260816/CLS別府第2回企画立案.pptx
@@ -21,6 +21,7 @@
     <p:sldId id="269" r:id="rId15"/>
     <p:sldId id="270" r:id="rId16"/>
     <p:sldId id="271" r:id="rId17"/>
+    <p:sldId id="274" r:id="rId25"/>
     <p:sldId id="272" r:id="rId18"/>
     <p:sldId id="273" r:id="rId19"/>
   </p:sldIdLst>
@@ -1046,10 +1047,8 @@
           <a:lstStyle/>
           <a:p>
             <a:r>
-              <a:rPr lang="en-US" dirty="0"/>
-              <a:t/>
-            </a:r>
-            <a:endParaRPr lang="en-US" dirty="0"/>
+              <a:t>名刺の入稿タイミングを決める。誰に渡すかのリストアップは今日この場で始める。</a:t>
+            </a:r>
           </a:p>
         </p:txBody>
       </p:sp>
@@ -1353,6 +1352,76 @@
 </p:notes>
 </file>
 
+<file path=ppt/notesSlides/notesSlide19.xml><?xml version="1.0" encoding="utf-8"?>
+<p:notes xmlns:a="http://schemas.openxmlformats.org/drawingml/2006/main" xmlns:p="http://schemas.openxmlformats.org/presentationml/2006/main" xmlns:r="http://schemas.openxmlformats.org/officeDocument/2006/relationships">
+  <p:cSld>
+    <p:spTree>
+      <p:nvGrpSpPr>
+        <p:cNvPr id="1" name=""/>
+        <p:cNvGrpSpPr/>
+        <p:nvPr/>
+      </p:nvGrpSpPr>
+      <p:grpSpPr>
+        <a:xfrm>
+          <a:off x="0" y="0"/>
+          <a:ext cx="0" cy="0"/>
+          <a:chOff x="0" y="0"/>
+          <a:chExt cx="0" cy="0"/>
+        </a:xfrm>
+      </p:grpSpPr>
+      <p:sp>
+        <p:nvSpPr>
+          <p:cNvPr id="2" name="Slide Image Placeholder 1"/>
+          <p:cNvSpPr>
+            <a:spLocks noGrp="1"/>
+          </p:cNvSpPr>
+          <p:nvPr>
+            <p:ph type="sldImg" idx="2"/>
+          </p:nvPr>
+        </p:nvSpPr>
+        <p:spPr/>
+      </p:sp>
+      <p:sp>
+        <p:nvSpPr>
+          <p:cNvPr id="3" name="Notes Placeholder 2"/>
+          <p:cNvSpPr>
+            <a:spLocks noGrp="1"/>
+          </p:cNvSpPr>
+          <p:nvPr>
+            <p:ph type="body" idx="3" sz="quarter"/>
+          </p:nvPr>
+        </p:nvSpPr>
+        <p:spPr/>
+        <p:txBody>
+          <a:bodyPr/>
+          <a:lstStyle/>
+          <a:p>
+            <a:r>
+              <a:t>出稽古の訪問先リストと、プレヒートの初回開催時期をこの場で仮決めする。</a:t>
+            </a:r>
+          </a:p>
+        </p:txBody>
+      </p:sp>
+      <p:sp>
+        <p:nvSpPr>
+          <p:cNvPr id="4" name="Slide Number Placeholder 3"/>
+          <p:cNvSpPr>
+            <a:spLocks noGrp="1"/>
+          </p:cNvSpPr>
+          <p:nvPr>
+            <p:ph type="sldNum" idx="5" sz="quarter"/>
+          </p:nvPr>
+        </p:nvSpPr>
+        <p:spPr/>
+      </p:sp>
+    </p:spTree>
+  </p:cSld>
+  <p:clrMapOvr>
+    <a:masterClrMapping/>
+  </p:clrMapOvr>
+</p:notes>
+</file>
+
 <file path=ppt/notesSlides/notesSlide2.xml><?xml version="1.0" encoding="utf-8"?>
 <p:notes xmlns:a="http://schemas.openxmlformats.org/drawingml/2006/main" xmlns:r="http://schemas.openxmlformats.org/officeDocument/2006/relationships" xmlns:p="http://schemas.openxmlformats.org/presentationml/2006/main">
   <p:cSld>
@@ -2014,10 +2083,8 @@
           <a:lstStyle/>
           <a:p>
             <a:r>
-              <a:rPr lang="en-US" dirty="0"/>
-              <a:t/>
-            </a:r>
-            <a:endParaRPr lang="en-US" dirty="0"/>
+              <a:t>第2回は「本編＋懇親会」のみ。合宿は事後に、次期運営候補だけを対象として実施する。</a:t>
+            </a:r>
           </a:p>
         </p:txBody>
       </p:sp>
@@ -2636,7 +2703,7 @@
                 <a:ea typeface="Meiryo" pitchFamily="34" charset="-122"/>
                 <a:cs typeface="Meiryo" pitchFamily="34" charset="-120"/>
               </a:rPr>
-              <a:t>「規模の縮小」ではなく「濃度の極大化」へ　—　別府・旅館での合宿型開催という解</a:t>
+              <a:t>「規模の縮小」ではなく「濃度の極大化」へ　—　レンガホールでの原点回帰と事後合宿</a:t>
             </a:r>
             <a:endParaRPr lang="en-US" sz="1500" dirty="0"/>
           </a:p>
@@ -2911,7 +2978,7 @@
                 <a:ea typeface="Meiryo" pitchFamily="34" charset="-122"/>
                 <a:cs typeface="Meiryo" pitchFamily="34" charset="-120"/>
               </a:rPr>
-              <a:t>パーパス／ビジョン／ミッション／バリューのドラフト</a:t>
+              <a:t>パーパス／ビジョン／ミッション／バリュー</a:t>
             </a:r>
             <a:endParaRPr lang="en-US" sz="1600" dirty="0"/>
           </a:p>
@@ -3216,7 +3283,7 @@
                 <a:ea typeface="Meiryo" pitchFamily="34" charset="-122"/>
                 <a:cs typeface="Meiryo" pitchFamily="34" charset="-120"/>
               </a:rPr>
-              <a:t>パーパス案</a:t>
+              <a:t>パーパス</a:t>
             </a:r>
             <a:endParaRPr lang="en-US" sz="3000" dirty="0"/>
           </a:p>
@@ -3289,7 +3356,7 @@
                 <a:ea typeface="Meiryo" pitchFamily="34" charset="-122"/>
                 <a:cs typeface="Meiryo" pitchFamily="34" charset="-120"/>
               </a:rPr>
-              <a:t>【案】</a:t>
+              <a:t>P</a:t>
             </a:r>
             <a:endParaRPr lang="en-US" sz="1300" dirty="0"/>
           </a:p>
@@ -3631,7 +3698,7 @@
                 <a:ea typeface="Meiryo" pitchFamily="34" charset="-122"/>
                 <a:cs typeface="Meiryo" pitchFamily="34" charset="-120"/>
               </a:rPr>
-              <a:t>ビジョン案とミッション案</a:t>
+              <a:t>ビジョンとミッション</a:t>
             </a:r>
             <a:endParaRPr lang="en-US" sz="3000" dirty="0"/>
           </a:p>
@@ -4136,7 +4203,7 @@
                 <a:ea typeface="Meiryo" pitchFamily="34" charset="-122"/>
                 <a:cs typeface="Meiryo" pitchFamily="34" charset="-120"/>
               </a:rPr>
-              <a:t>平野氏の「可能性の開花と前進を応援する」に直結。合宿型という濃密な空間で参加者同士が深いレベルで自己開示を行い（同じ湯に浸かり）、一人では踏み出せなかった挑戦への最初のアクションを誘発する（背中を押す）。</a:t>
+              <a:t>平野氏の「可能性の開花と前進を応援する」に直結。濃密な空間で参加者同士が深いレベルで自己開示を行い（同じ湯に浸かり）、一人では踏み出せなかった挑戦への最初のアクションを誘発する（背中を押す）。</a:t>
             </a:r>
             <a:endParaRPr lang="en-US" sz="1200" dirty="0"/>
           </a:p>
@@ -5759,7 +5826,7 @@
                 <a:ea typeface="Meiryo" pitchFamily="34" charset="-122"/>
                 <a:cs typeface="Meiryo" pitchFamily="34" charset="-120"/>
               </a:rPr>
-              <a:t>「大分・別府という特異なフィールドで、地域課題の最前線に立つリーダーたちと深い関係値を築けます。合宿という密室空間で、自社の技術やビジョンへの強い共感者（エバンジェリスト）を生み出す場です。」</a:t>
+              <a:t>「大分・別府という特異なフィールドで、地域課題の最前線に立つリーダーたちと深い関係値を築けます。自社の技術やビジョンへの強い共感者（エバンジェリスト）を生み出す場です。」</a:t>
             </a:r>
             <a:endParaRPr lang="en-US" sz="1100" dirty="0"/>
           </a:p>
@@ -5947,7 +6014,7 @@
                 <a:ea typeface="Meiryo" pitchFamily="34" charset="-122"/>
                 <a:cs typeface="Meiryo" pitchFamily="34" charset="-120"/>
               </a:rPr>
-              <a:t>運営メンバーは「量より質」で獲る</a:t>
+              <a:t>PVMVを刻んだ「名刺」で名指しに巻き込む</a:t>
             </a:r>
             <a:endParaRPr lang="en-US" sz="3000" dirty="0"/>
           </a:p>
@@ -5986,7 +6053,7 @@
                 <a:ea typeface="Meiryo" pitchFamily="34" charset="-122"/>
                 <a:cs typeface="Meiryo" pitchFamily="34" charset="-120"/>
               </a:rPr>
-              <a:t>極端に増やせない以上、自走できるコアメンバー（各領域のハブとなれる人材）の確保が急務。</a:t>
+              <a:t>今後の登壇者・参加者・スポンサー候補へのリーチにおいて、最大の武器となるのが「PVMVを記載した専用名刺」の活用である。</a:t>
             </a:r>
             <a:endParaRPr lang="en-US" sz="1250" dirty="0"/>
           </a:p>
@@ -6123,7 +6190,7 @@
                 <a:ea typeface="Meiryo" pitchFamily="34" charset="-122"/>
                 <a:cs typeface="Meiryo" pitchFamily="34" charset="-120"/>
               </a:rPr>
-              <a:t>ターゲット層</a:t>
+              <a:t>誰に渡すか</a:t>
             </a:r>
             <a:endParaRPr lang="en-US" sz="1700" dirty="0"/>
           </a:p>
@@ -6165,7 +6232,7 @@
                 <a:ea typeface="Meiryo" pitchFamily="34" charset="-122"/>
                 <a:cs typeface="Meiryo" pitchFamily="34" charset="-120"/>
               </a:rPr>
-              <a:t>大分・別府エリアで、すでに小規模なコミュニティを主宰しているリーダー層。</a:t>
+              <a:t>運営3名がそれぞれの日常業務や他のコミュニティ活動の中で出会った「熱量の高い人」。</a:t>
             </a:r>
             <a:endParaRPr lang="en-US" sz="1300" dirty="0"/>
           </a:p>
@@ -6231,7 +6298,7 @@
                 <a:ea typeface="Meiryo" pitchFamily="34" charset="-122"/>
                 <a:cs typeface="Meiryo" pitchFamily="34" charset="-120"/>
               </a:rPr>
-              <a:t>技術勉強会の主催者</a:t>
+              <a:t>技術勉強会・ユーザグループ</a:t>
             </a:r>
             <a:endParaRPr lang="en-US" sz="1200" dirty="0"/>
           </a:p>
@@ -6297,7 +6364,7 @@
                 <a:ea typeface="Meiryo" pitchFamily="34" charset="-122"/>
                 <a:cs typeface="Meiryo" pitchFamily="34" charset="-120"/>
               </a:rPr>
-              <a:t>若手経営者の会</a:t>
+              <a:t>金融機関の営業活動・取引先</a:t>
             </a:r>
             <a:endParaRPr lang="en-US" sz="1200" dirty="0"/>
           </a:p>
@@ -6363,7 +6430,7 @@
                 <a:ea typeface="Meiryo" pitchFamily="34" charset="-122"/>
                 <a:cs typeface="Meiryo" pitchFamily="34" charset="-120"/>
               </a:rPr>
-              <a:t>地域おこしの任意団体</a:t>
+              <a:t>地域コミュニティのリーダー</a:t>
             </a:r>
             <a:endParaRPr lang="en-US" sz="1200" dirty="0"/>
           </a:p>
@@ -6377,7 +6444,7 @@
         </p:nvSpPr>
         <p:spPr>
           <a:xfrm>
-            <a:off x="960120" y="4937760"/>
+            <a:off x="960120" y="4846320"/>
             <a:ext cx="4754880" cy="320040"/>
           </a:xfrm>
           <a:prstGeom prst="rect">
@@ -6402,7 +6469,7 @@
                 <a:ea typeface="Meiryo" pitchFamily="34" charset="-122"/>
                 <a:cs typeface="Meiryo" pitchFamily="34" charset="-120"/>
               </a:rPr>
-              <a:t>ただし、活動の広がりや運営に限界（孤独感）を感じていること。</a:t>
+              <a:t>登壇してほしい人、来てほしい人を名指しで決めてから渡す。</a:t>
             </a:r>
             <a:endParaRPr lang="en-US" sz="1150" dirty="0"/>
           </a:p>
@@ -6539,7 +6606,7 @@
                 <a:ea typeface="Meiryo" pitchFamily="34" charset="-122"/>
                 <a:cs typeface="Meiryo" pitchFamily="34" charset="-120"/>
               </a:rPr>
-              <a:t>アプローチ手法</a:t>
+              <a:t>名刺で何を伝えるか</a:t>
             </a:r>
             <a:endParaRPr lang="en-US" sz="1700" dirty="0"/>
           </a:p>
@@ -6578,7 +6645,7 @@
                 <a:ea typeface="Meiryo" pitchFamily="34" charset="-122"/>
                 <a:cs typeface="Meiryo" pitchFamily="34" charset="-120"/>
               </a:rPr>
-              <a:t>× 労働力の要求</a:t>
+              <a:t>× 単なるイベント告知</a:t>
             </a:r>
             <a:endParaRPr lang="en-US" sz="1350" dirty="0"/>
           </a:p>
@@ -6617,7 +6684,7 @@
                 <a:ea typeface="Meiryo" pitchFamily="34" charset="-122"/>
                 <a:cs typeface="Meiryo" pitchFamily="34" charset="-120"/>
               </a:rPr>
-              <a:t>「イベントの手伝いをしてほしい」</a:t>
+              <a:t>日時と会場だけを伝えるチラシ配り</a:t>
             </a:r>
             <a:endParaRPr lang="en-US" sz="1200" dirty="0"/>
           </a:p>
@@ -6656,7 +6723,7 @@
                 <a:ea typeface="Meiryo" pitchFamily="34" charset="-122"/>
                 <a:cs typeface="Meiryo" pitchFamily="34" charset="-120"/>
               </a:rPr>
-              <a:t>○ 相互利益の提案</a:t>
+              <a:t>○ 理念共感型のリクルーティング</a:t>
             </a:r>
             <a:endParaRPr lang="en-US" sz="1350" dirty="0"/>
           </a:p>
@@ -6698,7 +6765,7 @@
                 <a:ea typeface="Meiryo" pitchFamily="34" charset="-122"/>
                 <a:cs typeface="Meiryo" pitchFamily="34" charset="-120"/>
               </a:rPr>
-              <a:t>「CLSという全国規模のプラットフォームを使って、あなたのコミュニティ活動のステージを一段引き上げないか？」</a:t>
+              <a:t>「我々はこういうビジョンで動いている。あなたに登壇してほしい」。名刺を手渡して「あなたにこそ来てほしい」と直接伝え、「はい、喜んで」の連鎖を生む。</a:t>
             </a:r>
             <a:endParaRPr lang="en-US" sz="1300" dirty="0"/>
           </a:p>
@@ -6886,7 +6953,7 @@
                 <a:ea typeface="Meiryo" pitchFamily="34" charset="-122"/>
                 <a:cs typeface="Meiryo" pitchFamily="34" charset="-120"/>
               </a:rPr>
-              <a:t>小規模開催では、ロゴ掲載型の広告協賛は企業側の投資対効果が合わない。合宿型ならではのメニューへ転換する。</a:t>
+              <a:t>小規模開催では、ロゴ掲載型の広告協賛は企業側の投資対効果が合わない。小規模開催ならではのメニューへ転換する。</a:t>
             </a:r>
             <a:endParaRPr lang="en-US" sz="1250" dirty="0"/>
           </a:p>
@@ -7129,7 +7196,7 @@
                 <a:ea typeface="Meiryo" pitchFamily="34" charset="-122"/>
                 <a:cs typeface="Meiryo" pitchFamily="34" charset="-120"/>
               </a:rPr>
-              <a:t>協賛企業の経営層や次世代リーダー候補を合宿へ派遣。彼らが抱えるリアルな事業課題（DX推進、採用難、新規事業開発）を、全国から集まった越境人材が夜通し議論し、解決の糸口を提示する「課題解決セッション」。</a:t>
+              <a:t>協賛企業の経営層や次世代リーダー候補を本編へ派遣。彼らが抱えるリアルな事業課題（DX推進、採用難、新規事業開発）を、全国から集まった越境人材が議論し、解決の糸口を提示する「課題解決セッション」。</a:t>
             </a:r>
             <a:endParaRPr lang="en-US" sz="1150" dirty="0"/>
           </a:p>
@@ -7372,7 +7439,7 @@
                 <a:ea typeface="Meiryo" pitchFamily="34" charset="-122"/>
                 <a:cs typeface="Meiryo" pitchFamily="34" charset="-120"/>
               </a:rPr>
-              <a:t>地域金融機関の立場から、地元中小企業に「社外の知見を導入するための実践的な社員研修」としてCLSへの協賛・参加を提案。大分市での開催も含め、地域のオープンイノベーションの場と位置づける。</a:t>
+              <a:t>地域金融機関の立場から、地元中小企業に「社外の知見を導入するための実践的な社員研修」としてCLSへの協賛・参加を提案。別府・レンガホールを地域のオープンイノベーションの場と位置づける。</a:t>
             </a:r>
             <a:endParaRPr lang="en-US" sz="1150" dirty="0"/>
           </a:p>
@@ -7669,6 +7736,666 @@
 </file>
 
 <file path=ppt/slides/slide17.xml><?xml version="1.0" encoding="utf-8"?>
+<p:sld xmlns:a="http://schemas.openxmlformats.org/drawingml/2006/main" xmlns:p="http://schemas.openxmlformats.org/presentationml/2006/main" xmlns:r="http://schemas.openxmlformats.org/officeDocument/2006/relationships">
+  <p:cSld>
+    <p:spTree>
+      <p:nvGrpSpPr>
+        <p:cNvPr id="1" name=""/>
+        <p:cNvGrpSpPr/>
+        <p:nvPr/>
+      </p:nvGrpSpPr>
+      <p:grpSpPr/>
+      <p:sp>
+        <p:nvSpPr>
+          <p:cNvPr id="2" name="Text 0"/>
+          <p:cNvSpPr/>
+          <p:nvPr/>
+        </p:nvSpPr>
+        <p:spPr>
+          <a:xfrm>
+            <a:off x="640080" y="201168"/>
+            <a:ext cx="10881360" cy="274320"/>
+          </a:xfrm>
+          <a:prstGeom prst="rect">
+            <a:avLst/>
+          </a:prstGeom>
+          <a:noFill/>
+          <a:ln/>
+        </p:spPr>
+        <p:txBody>
+          <a:bodyPr wrap="square" lIns="0" tIns="0" rIns="0" bIns="0" rtlCol="0" anchor="ctr"/>
+          <a:lstStyle/>
+          <a:p>
+            <a:pPr indent="0" marL="0">
+              <a:buNone/>
+            </a:pPr>
+            <a:r>
+              <a:rPr lang="en-US" sz="1150" b="1" spc="200" kern="0" dirty="0">
+                <a:solidFill>
+                  <a:srgbClr val="E2703A"/>
+                </a:solidFill>
+                <a:latin typeface="Meiryo" pitchFamily="34" charset="0"/>
+                <a:ea typeface="Meiryo" pitchFamily="34" charset="-122"/>
+                <a:cs typeface="Meiryo" pitchFamily="34" charset="-120"/>
+              </a:rPr>
+              <a:t>ACTION 03</a:t>
+            </a:r>
+            <a:endParaRPr lang="en-US" sz="1150" dirty="0"/>
+          </a:p>
+        </p:txBody>
+      </p:sp>
+      <p:sp>
+        <p:nvSpPr>
+          <p:cNvPr id="3" name="Text 1"/>
+          <p:cNvSpPr/>
+          <p:nvPr/>
+        </p:nvSpPr>
+        <p:spPr>
+          <a:xfrm>
+            <a:off x="640080" y="411480"/>
+            <a:ext cx="10881360" cy="822960"/>
+          </a:xfrm>
+          <a:prstGeom prst="rect">
+            <a:avLst/>
+          </a:prstGeom>
+          <a:noFill/>
+          <a:ln/>
+        </p:spPr>
+        <p:txBody>
+          <a:bodyPr wrap="square" lIns="0" tIns="0" rIns="0" bIns="0" rtlCol="0" anchor="ctr"/>
+          <a:lstStyle/>
+          <a:p>
+            <a:pPr algn="l" indent="0" marL="0">
+              <a:buNone/>
+            </a:pPr>
+            <a:r>
+              <a:rPr lang="en-US" sz="3000" b="1" dirty="0">
+                <a:solidFill>
+                  <a:srgbClr val="132A4A"/>
+                </a:solidFill>
+                <a:latin typeface="Meiryo" pitchFamily="34" charset="0"/>
+                <a:ea typeface="Meiryo" pitchFamily="34" charset="-122"/>
+                <a:cs typeface="Meiryo" pitchFamily="34" charset="-120"/>
+              </a:rPr>
+              <a:t>参加者は「面」で集め、「名指し」で巻き込む</a:t>
+            </a:r>
+            <a:endParaRPr lang="en-US" sz="3000" dirty="0"/>
+          </a:p>
+        </p:txBody>
+      </p:sp>
+      <p:sp>
+        <p:nvSpPr>
+          <p:cNvPr id="4" name="Text 2"/>
+          <p:cNvSpPr/>
+          <p:nvPr/>
+        </p:nvSpPr>
+        <p:spPr>
+          <a:xfrm>
+            <a:off x="640080" y="1298448"/>
+            <a:ext cx="10881360" cy="365760"/>
+          </a:xfrm>
+          <a:prstGeom prst="rect">
+            <a:avLst/>
+          </a:prstGeom>
+          <a:noFill/>
+          <a:ln/>
+        </p:spPr>
+        <p:txBody>
+          <a:bodyPr wrap="square" lIns="0" tIns="0" rIns="0" bIns="0" rtlCol="0" anchor="ctr"/>
+          <a:lstStyle/>
+          <a:p>
+            <a:pPr indent="0" marL="0">
+              <a:buNone/>
+            </a:pPr>
+            <a:r>
+              <a:rPr lang="en-US" sz="1250" dirty="0">
+                <a:solidFill>
+                  <a:srgbClr val="667384"/>
+                </a:solidFill>
+                <a:latin typeface="Meiryo" pitchFamily="34" charset="0"/>
+                <a:ea typeface="Meiryo" pitchFamily="34" charset="-122"/>
+                <a:cs typeface="Meiryo" pitchFamily="34" charset="-120"/>
+              </a:rPr>
+              <a:t>不特定多数へのマス広告ではなく、熱量の高い層へピンポイントでリーチする。PVMV名刺を携えて「当事者」として巻き込む。</a:t>
+            </a:r>
+            <a:endParaRPr lang="en-US" sz="1250" dirty="0"/>
+          </a:p>
+        </p:txBody>
+      </p:sp>
+      <p:sp>
+        <p:nvSpPr>
+          <p:cNvPr id="5" name="Shape 3"/>
+          <p:cNvSpPr/>
+          <p:nvPr/>
+        </p:nvSpPr>
+        <p:spPr>
+          <a:xfrm>
+            <a:off x="640080" y="1874520"/>
+            <a:ext cx="5394960" cy="3520440"/>
+          </a:xfrm>
+          <a:prstGeom prst="roundRect">
+            <a:avLst>
+              <a:gd name="adj" fmla="val 2078"/>
+            </a:avLst>
+          </a:prstGeom>
+          <a:solidFill>
+            <a:srgbClr val="F4F7FA"/>
+          </a:solidFill>
+          <a:ln w="9525">
+            <a:solidFill>
+              <a:srgbClr val="E3E9F0"/>
+            </a:solidFill>
+            <a:prstDash val="solid"/>
+          </a:ln>
+          <a:effectLst>
+            <a:outerShdw sx="100000" sy="100000" kx="0" ky="0" algn="bl" rotWithShape="0" blurRad="101600" dist="508" dir="5400000">
+              <a:srgbClr val="9AA7B5">
+                <a:alpha val="22000"/>
+              </a:srgbClr>
+            </a:outerShdw>
+          </a:effectLst>
+        </p:spPr>
+      </p:sp>
+      <p:sp>
+        <p:nvSpPr>
+          <p:cNvPr id="6" name="Shape 4"/>
+          <p:cNvSpPr/>
+          <p:nvPr/>
+        </p:nvSpPr>
+        <p:spPr>
+          <a:xfrm>
+            <a:off x="932688" y="2148840"/>
+            <a:ext cx="1691640" cy="310896"/>
+          </a:xfrm>
+          <a:prstGeom prst="roundRect">
+            <a:avLst>
+              <a:gd name="adj" fmla="val 50000"/>
+            </a:avLst>
+          </a:prstGeom>
+          <a:solidFill>
+            <a:srgbClr val="E2703A"/>
+          </a:solidFill>
+          <a:ln w="12700">
+            <a:solidFill>
+              <a:srgbClr val="333333"/>
+            </a:solidFill>
+            <a:prstDash val="solid"/>
+          </a:ln>
+        </p:spPr>
+      </p:sp>
+      <p:sp>
+        <p:nvSpPr>
+          <p:cNvPr id="7" name="Text 5"/>
+          <p:cNvSpPr/>
+          <p:nvPr/>
+        </p:nvSpPr>
+        <p:spPr>
+          <a:xfrm>
+            <a:off x="932688" y="2148840"/>
+            <a:ext cx="1691640" cy="310896"/>
+          </a:xfrm>
+          <a:prstGeom prst="rect">
+            <a:avLst/>
+          </a:prstGeom>
+          <a:noFill/>
+          <a:ln/>
+        </p:spPr>
+        <p:txBody>
+          <a:bodyPr wrap="square" lIns="0" tIns="0" rIns="0" bIns="0" rtlCol="0" anchor="ctr"/>
+          <a:lstStyle/>
+          <a:p>
+            <a:pPr algn="ctr" indent="0" marL="0">
+              <a:buNone/>
+            </a:pPr>
+            <a:r>
+              <a:rPr lang="en-US" sz="950" b="1" dirty="0">
+                <a:solidFill>
+                  <a:srgbClr val="FFFFFF"/>
+                </a:solidFill>
+                <a:latin typeface="Meiryo" pitchFamily="34" charset="0"/>
+                <a:ea typeface="Meiryo" pitchFamily="34" charset="-122"/>
+                <a:cs typeface="Meiryo" pitchFamily="34" charset="-120"/>
+              </a:rPr>
+              <a:t>面で繋ぐ</a:t>
+            </a:r>
+            <a:endParaRPr lang="en-US" sz="950" dirty="0"/>
+          </a:p>
+        </p:txBody>
+      </p:sp>
+      <p:sp>
+        <p:nvSpPr>
+          <p:cNvPr id="8" name="Text 6"/>
+          <p:cNvSpPr/>
+          <p:nvPr/>
+        </p:nvSpPr>
+        <p:spPr>
+          <a:xfrm>
+            <a:off x="932688" y="2606040"/>
+            <a:ext cx="4809744" cy="914400"/>
+          </a:xfrm>
+          <a:prstGeom prst="rect">
+            <a:avLst/>
+          </a:prstGeom>
+          <a:noFill/>
+          <a:ln/>
+        </p:spPr>
+        <p:txBody>
+          <a:bodyPr wrap="square" lIns="0" tIns="0" rIns="0" bIns="0" rtlCol="0" anchor="t"/>
+          <a:lstStyle/>
+          <a:p>
+            <a:pPr indent="0" marL="0">
+              <a:lnSpc>
+                <a:spcPts val="2700"/>
+              </a:lnSpc>
+              <a:buNone/>
+            </a:pPr>
+            <a:r>
+              <a:rPr lang="en-US" sz="2000" b="1" dirty="0">
+                <a:solidFill>
+                  <a:srgbClr val="132A4A"/>
+                </a:solidFill>
+                <a:latin typeface="Meiryo" pitchFamily="34" charset="0"/>
+                <a:ea typeface="Meiryo" pitchFamily="34" charset="-122"/>
+                <a:cs typeface="Meiryo" pitchFamily="34" charset="-120"/>
+              </a:rPr>
+              <a:t>既存コミュニティ</a:t>
+            </a:r>
+            <a:endParaRPr lang="en-US" sz="2000" dirty="0"/>
+          </a:p>
+          <a:p>
+            <a:pPr indent="0" marL="0">
+              <a:lnSpc>
+                <a:spcPts val="2700"/>
+              </a:lnSpc>
+              <a:buNone/>
+            </a:pPr>
+            <a:r>
+              <a:rPr lang="en-US" sz="2000" b="1" dirty="0">
+                <a:solidFill>
+                  <a:srgbClr val="132A4A"/>
+                </a:solidFill>
+                <a:latin typeface="Meiryo" pitchFamily="34" charset="0"/>
+                <a:ea typeface="Meiryo" pitchFamily="34" charset="-122"/>
+                <a:cs typeface="Meiryo" pitchFamily="34" charset="-120"/>
+              </a:rPr>
+              <a:t>への「出稽古」</a:t>
+            </a:r>
+            <a:endParaRPr lang="en-US" sz="2000" dirty="0"/>
+          </a:p>
+        </p:txBody>
+      </p:sp>
+      <p:sp>
+        <p:nvSpPr>
+          <p:cNvPr id="9" name="Text 7"/>
+          <p:cNvSpPr/>
+          <p:nvPr/>
+        </p:nvSpPr>
+        <p:spPr>
+          <a:xfrm>
+            <a:off x="932688" y="3566160"/>
+            <a:ext cx="4809744" cy="274320"/>
+          </a:xfrm>
+          <a:prstGeom prst="rect">
+            <a:avLst/>
+          </a:prstGeom>
+          <a:noFill/>
+          <a:ln/>
+        </p:spPr>
+        <p:txBody>
+          <a:bodyPr wrap="square" lIns="0" tIns="0" rIns="0" bIns="0" rtlCol="0" anchor="ctr"/>
+          <a:lstStyle/>
+          <a:p>
+            <a:pPr indent="0" marL="0">
+              <a:buNone/>
+            </a:pPr>
+            <a:r>
+              <a:rPr lang="en-US" sz="1100" b="1" dirty="0">
+                <a:solidFill>
+                  <a:srgbClr val="E2703A"/>
+                </a:solidFill>
+                <a:latin typeface="Meiryo" pitchFamily="34" charset="0"/>
+                <a:ea typeface="Meiryo" pitchFamily="34" charset="-122"/>
+                <a:cs typeface="Meiryo" pitchFamily="34" charset="-120"/>
+              </a:rPr>
+              <a:t>運営メンバー自らが足を運ぶ</a:t>
+            </a:r>
+            <a:endParaRPr lang="en-US" sz="1100" dirty="0"/>
+          </a:p>
+        </p:txBody>
+      </p:sp>
+      <p:sp>
+        <p:nvSpPr>
+          <p:cNvPr id="10" name="Text 8"/>
+          <p:cNvSpPr/>
+          <p:nvPr/>
+        </p:nvSpPr>
+        <p:spPr>
+          <a:xfrm>
+            <a:off x="932688" y="3886200"/>
+            <a:ext cx="4809744" cy="1371600"/>
+          </a:xfrm>
+          <a:prstGeom prst="rect">
+            <a:avLst/>
+          </a:prstGeom>
+          <a:noFill/>
+          <a:ln/>
+        </p:spPr>
+        <p:txBody>
+          <a:bodyPr wrap="square" lIns="0" tIns="0" rIns="0" bIns="0" rtlCol="0" anchor="t"/>
+          <a:lstStyle/>
+          <a:p>
+            <a:pPr indent="0" marL="0">
+              <a:lnSpc>
+                <a:spcPts val="1800"/>
+              </a:lnSpc>
+              <a:buNone/>
+            </a:pPr>
+            <a:r>
+              <a:rPr lang="en-US" sz="1150" dirty="0">
+                <a:solidFill>
+                  <a:srgbClr val="1F2933"/>
+                </a:solidFill>
+                <a:latin typeface="Meiryo" pitchFamily="34" charset="0"/>
+                <a:ea typeface="Meiryo" pitchFamily="34" charset="-122"/>
+                <a:cs typeface="Meiryo" pitchFamily="34" charset="-120"/>
+              </a:rPr>
+              <a:t>大分・別府エリアの他コミュニティ（技術系勉強会、ITユーザグループ、BEPPU FAN TOWN など）へ運営自らが足を運び、PVMV名刺を配りながら直接参加を呼びかける。点在するコミュニティをCLSというハブへ接続する。</a:t>
+            </a:r>
+            <a:endParaRPr lang="en-US" sz="1150" dirty="0"/>
+          </a:p>
+        </p:txBody>
+      </p:sp>
+      <p:sp>
+        <p:nvSpPr>
+          <p:cNvPr id="11" name="Shape 9"/>
+          <p:cNvSpPr/>
+          <p:nvPr/>
+        </p:nvSpPr>
+        <p:spPr>
+          <a:xfrm>
+            <a:off x="6400800" y="1874520"/>
+            <a:ext cx="5394960" cy="3520440"/>
+          </a:xfrm>
+          <a:prstGeom prst="roundRect">
+            <a:avLst>
+              <a:gd name="adj" fmla="val 2078"/>
+            </a:avLst>
+          </a:prstGeom>
+          <a:solidFill>
+            <a:srgbClr val="F4F7FA"/>
+          </a:solidFill>
+          <a:ln w="9525">
+            <a:solidFill>
+              <a:srgbClr val="E3E9F0"/>
+            </a:solidFill>
+            <a:prstDash val="solid"/>
+          </a:ln>
+          <a:effectLst>
+            <a:outerShdw sx="100000" sy="100000" kx="0" ky="0" algn="bl" rotWithShape="0" blurRad="101600" dist="508" dir="5400000">
+              <a:srgbClr val="9AA7B5">
+                <a:alpha val="22000"/>
+              </a:srgbClr>
+            </a:outerShdw>
+          </a:effectLst>
+        </p:spPr>
+      </p:sp>
+      <p:sp>
+        <p:nvSpPr>
+          <p:cNvPr id="12" name="Shape 10"/>
+          <p:cNvSpPr/>
+          <p:nvPr/>
+        </p:nvSpPr>
+        <p:spPr>
+          <a:xfrm>
+            <a:off x="6693408" y="2148840"/>
+            <a:ext cx="1691640" cy="310896"/>
+          </a:xfrm>
+          <a:prstGeom prst="roundRect">
+            <a:avLst>
+              <a:gd name="adj" fmla="val 50000"/>
+            </a:avLst>
+          </a:prstGeom>
+          <a:solidFill>
+            <a:srgbClr val="132A4A"/>
+          </a:solidFill>
+          <a:ln w="12700">
+            <a:solidFill>
+              <a:srgbClr val="333333"/>
+            </a:solidFill>
+            <a:prstDash val="solid"/>
+          </a:ln>
+        </p:spPr>
+      </p:sp>
+      <p:sp>
+        <p:nvSpPr>
+          <p:cNvPr id="13" name="Text 11"/>
+          <p:cNvSpPr/>
+          <p:nvPr/>
+        </p:nvSpPr>
+        <p:spPr>
+          <a:xfrm>
+            <a:off x="6693408" y="2148840"/>
+            <a:ext cx="1691640" cy="310896"/>
+          </a:xfrm>
+          <a:prstGeom prst="rect">
+            <a:avLst/>
+          </a:prstGeom>
+          <a:noFill/>
+          <a:ln/>
+        </p:spPr>
+        <p:txBody>
+          <a:bodyPr wrap="square" lIns="0" tIns="0" rIns="0" bIns="0" rtlCol="0" anchor="ctr"/>
+          <a:lstStyle/>
+          <a:p>
+            <a:pPr algn="ctr" indent="0" marL="0">
+              <a:buNone/>
+            </a:pPr>
+            <a:r>
+              <a:rPr lang="en-US" sz="950" b="1" dirty="0">
+                <a:solidFill>
+                  <a:srgbClr val="FFFFFF"/>
+                </a:solidFill>
+                <a:latin typeface="Meiryo" pitchFamily="34" charset="0"/>
+                <a:ea typeface="Meiryo" pitchFamily="34" charset="-122"/>
+                <a:cs typeface="Meiryo" pitchFamily="34" charset="-120"/>
+              </a:rPr>
+              <a:t>事前熱狂</a:t>
+            </a:r>
+            <a:endParaRPr lang="en-US" sz="950" dirty="0"/>
+          </a:p>
+        </p:txBody>
+      </p:sp>
+      <p:sp>
+        <p:nvSpPr>
+          <p:cNvPr id="14" name="Text 12"/>
+          <p:cNvSpPr/>
+          <p:nvPr/>
+        </p:nvSpPr>
+        <p:spPr>
+          <a:xfrm>
+            <a:off x="6693408" y="2606040"/>
+            <a:ext cx="4809744" cy="914400"/>
+          </a:xfrm>
+          <a:prstGeom prst="rect">
+            <a:avLst/>
+          </a:prstGeom>
+          <a:noFill/>
+          <a:ln/>
+        </p:spPr>
+        <p:txBody>
+          <a:bodyPr wrap="square" lIns="0" tIns="0" rIns="0" bIns="0" rtlCol="0" anchor="t"/>
+          <a:lstStyle/>
+          <a:p>
+            <a:pPr indent="0" marL="0">
+              <a:lnSpc>
+                <a:spcPts val="2700"/>
+              </a:lnSpc>
+              <a:buNone/>
+            </a:pPr>
+            <a:r>
+              <a:rPr lang="en-US" sz="2000" b="1" dirty="0">
+                <a:solidFill>
+                  <a:srgbClr val="132A4A"/>
+                </a:solidFill>
+                <a:latin typeface="Meiryo" pitchFamily="34" charset="0"/>
+                <a:ea typeface="Meiryo" pitchFamily="34" charset="-122"/>
+                <a:cs typeface="Meiryo" pitchFamily="34" charset="-120"/>
+              </a:rPr>
+              <a:t>プレヒート</a:t>
+            </a:r>
+            <a:endParaRPr lang="en-US" sz="2000" dirty="0"/>
+          </a:p>
+          <a:p>
+            <a:pPr indent="0" marL="0">
+              <a:lnSpc>
+                <a:spcPts val="2700"/>
+              </a:lnSpc>
+              <a:buNone/>
+            </a:pPr>
+            <a:r>
+              <a:rPr lang="en-US" sz="2000" b="1" dirty="0">
+                <a:solidFill>
+                  <a:srgbClr val="132A4A"/>
+                </a:solidFill>
+                <a:latin typeface="Meiryo" pitchFamily="34" charset="0"/>
+                <a:ea typeface="Meiryo" pitchFamily="34" charset="-122"/>
+                <a:cs typeface="Meiryo" pitchFamily="34" charset="-120"/>
+              </a:rPr>
+              <a:t>イベント</a:t>
+            </a:r>
+            <a:endParaRPr lang="en-US" sz="2000" dirty="0"/>
+          </a:p>
+        </p:txBody>
+      </p:sp>
+      <p:sp>
+        <p:nvSpPr>
+          <p:cNvPr id="15" name="Text 13"/>
+          <p:cNvSpPr/>
+          <p:nvPr/>
+        </p:nvSpPr>
+        <p:spPr>
+          <a:xfrm>
+            <a:off x="6693408" y="3566160"/>
+            <a:ext cx="4809744" cy="274320"/>
+          </a:xfrm>
+          <a:prstGeom prst="rect">
+            <a:avLst/>
+          </a:prstGeom>
+          <a:noFill/>
+          <a:ln/>
+        </p:spPr>
+        <p:txBody>
+          <a:bodyPr wrap="square" lIns="0" tIns="0" rIns="0" bIns="0" rtlCol="0" anchor="ctr"/>
+          <a:lstStyle/>
+          <a:p>
+            <a:pPr indent="0" marL="0">
+              <a:buNone/>
+            </a:pPr>
+            <a:r>
+              <a:rPr lang="en-US" sz="1100" b="1" dirty="0">
+                <a:solidFill>
+                  <a:srgbClr val="E2703A"/>
+                </a:solidFill>
+                <a:latin typeface="Meiryo" pitchFamily="34" charset="0"/>
+                <a:ea typeface="Meiryo" pitchFamily="34" charset="-122"/>
+                <a:cs typeface="Meiryo" pitchFamily="34" charset="-120"/>
+              </a:rPr>
+              <a:t>本編の数ヶ月前から</a:t>
+            </a:r>
+            <a:endParaRPr lang="en-US" sz="1100" dirty="0"/>
+          </a:p>
+        </p:txBody>
+      </p:sp>
+      <p:sp>
+        <p:nvSpPr>
+          <p:cNvPr id="16" name="Text 14"/>
+          <p:cNvSpPr/>
+          <p:nvPr/>
+        </p:nvSpPr>
+        <p:spPr>
+          <a:xfrm>
+            <a:off x="6693408" y="3886200"/>
+            <a:ext cx="4809744" cy="1371600"/>
+          </a:xfrm>
+          <a:prstGeom prst="rect">
+            <a:avLst/>
+          </a:prstGeom>
+          <a:noFill/>
+          <a:ln/>
+        </p:spPr>
+        <p:txBody>
+          <a:bodyPr wrap="square" lIns="0" tIns="0" rIns="0" bIns="0" rtlCol="0" anchor="t"/>
+          <a:lstStyle/>
+          <a:p>
+            <a:pPr indent="0" marL="0">
+              <a:lnSpc>
+                <a:spcPts val="1800"/>
+              </a:lnSpc>
+              <a:buNone/>
+            </a:pPr>
+            <a:r>
+              <a:rPr lang="en-US" sz="1150" dirty="0">
+                <a:solidFill>
+                  <a:srgbClr val="1F2933"/>
+                </a:solidFill>
+                <a:latin typeface="Meiryo" pitchFamily="34" charset="0"/>
+                <a:ea typeface="Meiryo" pitchFamily="34" charset="-122"/>
+                <a:cs typeface="Meiryo" pitchFamily="34" charset="-120"/>
+              </a:rPr>
+              <a:t>初参加者が抱く「コミュニティのノリについていけるか」という不安を払拭するため、少人数の事前交流会をオンライン・オフラインで開催。CLSの楽しみ方と文脈を先に共有し、参加の心理的ハードルを下げる。</a:t>
+            </a:r>
+            <a:endParaRPr lang="en-US" sz="1150" dirty="0"/>
+          </a:p>
+        </p:txBody>
+      </p:sp>
+      <p:sp>
+        <p:nvSpPr>
+          <p:cNvPr id="23" name="Text 21"/>
+          <p:cNvSpPr/>
+          <p:nvPr/>
+        </p:nvSpPr>
+        <p:spPr>
+          <a:xfrm>
+            <a:off x="11155680" y="6291072"/>
+            <a:ext cx="548640" cy="320040"/>
+          </a:xfrm>
+          <a:prstGeom prst="rect">
+            <a:avLst/>
+          </a:prstGeom>
+          <a:noFill/>
+          <a:ln/>
+        </p:spPr>
+        <p:txBody>
+          <a:bodyPr wrap="square" lIns="0" tIns="0" rIns="0" bIns="0" rtlCol="0" anchor="ctr"/>
+          <a:lstStyle/>
+          <a:p>
+            <a:pPr algn="r" indent="0" marL="0">
+              <a:buNone/>
+            </a:pPr>
+            <a:r>
+              <a:rPr lang="en-US" sz="1000" dirty="0">
+                <a:solidFill>
+                  <a:srgbClr val="667384"/>
+                </a:solidFill>
+                <a:latin typeface="Meiryo" pitchFamily="34" charset="0"/>
+                <a:ea typeface="Meiryo" pitchFamily="34" charset="-122"/>
+                <a:cs typeface="Meiryo" pitchFamily="34" charset="-120"/>
+              </a:rPr>
+              <a:t>17</a:t>
+            </a:r>
+            <a:endParaRPr lang="en-US" sz="1000" dirty="0"/>
+          </a:p>
+        </p:txBody>
+      </p:sp>
+    </p:spTree>
+  </p:cSld>
+  <p:clrMapOvr>
+    <a:masterClrMapping/>
+  </p:clrMapOvr>
+</p:sld>
+</file>
+
+<file path=ppt/slides/slide18.xml><?xml version="1.0" encoding="utf-8"?>
 <p:sld xmlns:a="http://schemas.openxmlformats.org/drawingml/2006/main" xmlns:r="http://schemas.openxmlformats.org/officeDocument/2006/relationships" xmlns:p="http://schemas.openxmlformats.org/presentationml/2006/main">
   <p:cSld name="Slide 17">
     <p:bg>
@@ -7716,6 +8443,10 @@
             <a:prstDash val="solid"/>
           </a:ln>
         </p:spPr>
+        <p:txBody>
+          <a:bodyPr/>
+          <a:p/>
+        </p:txBody>
       </p:sp>
       <p:sp>
         <p:nvSpPr>
@@ -7821,6 +8552,10 @@
             <a:prstDash val="solid"/>
           </a:ln>
         </p:spPr>
+        <p:txBody>
+          <a:bodyPr/>
+          <a:p/>
+        </p:txBody>
       </p:sp>
       <p:sp>
         <p:nvSpPr>
@@ -7926,6 +8661,10 @@
             <a:prstDash val="solid"/>
           </a:ln>
         </p:spPr>
+        <p:txBody>
+          <a:bodyPr/>
+          <a:p/>
+        </p:txBody>
       </p:sp>
       <p:sp>
         <p:nvSpPr>
@@ -8041,7 +8780,7 @@
                 <a:ea typeface="Meiryo" pitchFamily="34" charset="-122"/>
                 <a:cs typeface="Meiryo" pitchFamily="34" charset="-120"/>
               </a:rPr>
-              <a:t>運営リソースが3名に限定されている現状は、悲観すべきではない。別府という土地が持つ「誰もが服を脱ぎ、同じ湯に浸かる」圧倒的な受容性とフラットな文化を極限まで活かし、旅館での「合宿型・少人数制」という濃密なフォーマットへ昇華させることで、大規模開催では決して得られない深い心理的安全性と自己変容の機会を提供できる。</a:t>
+              <a:t>運営リソースが3名に限定されている現状は、悲観すべきではない。第0回の熱狂を生んだ「レンガホールでの本編＋懇親会」へ戦略的に原点回帰し、付帯イベントを削ぎ落として運営の持続可能性を担保する。その上で、PVMVを刻んだ名刺で一人ひとりの当事者を直接巻き込み、イベント後には次期運営候補を対象とした少人数の合宿でコアコミュニティの火種を次へ繋ぐ。</a:t>
             </a:r>
             <a:endParaRPr lang="en-US" sz="1350" dirty="0"/>
           </a:p>
@@ -8119,7 +8858,7 @@
                 <a:ea typeface="Meiryo" pitchFamily="34" charset="-122"/>
                 <a:cs typeface="Meiryo" pitchFamily="34" charset="-120"/>
               </a:rPr>
-              <a:t>17</a:t>
+              <a:t>18</a:t>
             </a:r>
             <a:endParaRPr lang="en-US" sz="1000" dirty="0"/>
           </a:p>
@@ -8133,7 +8872,7 @@
 </p:sld>
 </file>
 
-<file path=ppt/slides/slide18.xml><?xml version="1.0" encoding="utf-8"?>
+<file path=ppt/slides/slide19.xml><?xml version="1.0" encoding="utf-8"?>
 <p:sld xmlns:a="http://schemas.openxmlformats.org/drawingml/2006/main" xmlns:r="http://schemas.openxmlformats.org/officeDocument/2006/relationships" xmlns:p="http://schemas.openxmlformats.org/presentationml/2006/main">
   <p:cSld name="Slide 18">
     <p:bg>
@@ -9321,7 +10060,7 @@
                 <a:ea typeface="Meiryo" pitchFamily="34" charset="-122"/>
                 <a:cs typeface="Meiryo" pitchFamily="34" charset="-120"/>
               </a:rPr>
-              <a:t>18</a:t>
+              <a:t>19</a:t>
             </a:r>
             <a:endParaRPr lang="en-US" sz="1000" dirty="0"/>
           </a:p>
@@ -9470,6 +10209,10 @@
             </a:outerShdw>
           </a:effectLst>
         </p:spPr>
+        <p:txBody>
+          <a:bodyPr/>
+          <a:p/>
+        </p:txBody>
       </p:sp>
       <p:sp>
         <p:nvSpPr>
@@ -9596,6 +10339,10 @@
             <a:prstDash val="solid"/>
           </a:ln>
         </p:spPr>
+        <p:txBody>
+          <a:bodyPr/>
+          <a:p/>
+        </p:txBody>
       </p:sp>
       <p:sp>
         <p:nvSpPr>
@@ -9738,6 +10485,10 @@
             <a:prstDash val="solid"/>
           </a:ln>
         </p:spPr>
+        <p:txBody>
+          <a:bodyPr/>
+          <a:p/>
+        </p:txBody>
       </p:sp>
       <p:sp>
         <p:nvSpPr>
@@ -9880,6 +10631,10 @@
             <a:prstDash val="solid"/>
           </a:ln>
         </p:spPr>
+        <p:txBody>
+          <a:bodyPr/>
+          <a:p/>
+        </p:txBody>
       </p:sp>
       <p:sp>
         <p:nvSpPr>
@@ -10022,6 +10777,10 @@
             <a:prstDash val="solid"/>
           </a:ln>
         </p:spPr>
+        <p:txBody>
+          <a:bodyPr/>
+          <a:p/>
+        </p:txBody>
       </p:sp>
       <p:sp>
         <p:nvSpPr>
@@ -10134,7 +10893,7 @@
                 <a:ea typeface="Meiryo" pitchFamily="34" charset="-122"/>
                 <a:cs typeface="Meiryo" pitchFamily="34" charset="-120"/>
               </a:rPr>
-              <a:t>合宿型・小規模開催の優位性</a:t>
+              <a:t>第2回の戦略的フォーマット</a:t>
             </a:r>
             <a:endParaRPr lang="en-US" sz="1150" dirty="0"/>
           </a:p>
@@ -10164,6 +10923,10 @@
             <a:prstDash val="solid"/>
           </a:ln>
         </p:spPr>
+        <p:txBody>
+          <a:bodyPr/>
+          <a:p/>
+        </p:txBody>
       </p:sp>
       <p:sp>
         <p:nvSpPr>
@@ -10306,6 +11069,10 @@
             <a:prstDash val="solid"/>
           </a:ln>
         </p:spPr>
+        <p:txBody>
+          <a:bodyPr/>
+          <a:p/>
+        </p:txBody>
       </p:sp>
       <p:sp>
         <p:nvSpPr>
@@ -10418,7 +11185,7 @@
                 <a:ea typeface="Meiryo" pitchFamily="34" charset="-122"/>
                 <a:cs typeface="Meiryo" pitchFamily="34" charset="-120"/>
               </a:rPr>
-              <a:t>運営勧誘と新しい協賛モデル</a:t>
+              <a:t>PVMV名刺・協賛モデル・参加者リーチ</a:t>
             </a:r>
             <a:endParaRPr lang="en-US" sz="1150" dirty="0"/>
           </a:p>
@@ -10903,7 +11670,7 @@
                 <a:ea typeface="Meiryo" pitchFamily="34" charset="-122"/>
                 <a:cs typeface="Meiryo" pitchFamily="34" charset="-120"/>
               </a:rPr>
-              <a:t>開催は2027年1〜2月想定</a:t>
+              <a:t>開催は2027年1月23日（土）</a:t>
             </a:r>
             <a:endParaRPr lang="en-US" sz="1350" dirty="0"/>
           </a:p>
@@ -10942,7 +11709,7 @@
                 <a:ea typeface="Meiryo" pitchFamily="34" charset="-122"/>
                 <a:cs typeface="Meiryo" pitchFamily="34" charset="-120"/>
               </a:rPr>
-              <a:t>別府／大分市周辺</a:t>
+              <a:t>別府レンガホール2階（第0回と同会場）</a:t>
             </a:r>
             <a:endParaRPr lang="en-US" sz="1150" dirty="0"/>
           </a:p>
@@ -11197,7 +11964,7 @@
                 <a:ea typeface="Meiryo" pitchFamily="34" charset="-122"/>
                 <a:cs typeface="Meiryo" pitchFamily="34" charset="-120"/>
               </a:rPr>
-              <a:t>地域を本気で良くしたい「地元の挑戦者」と、全国で活躍する「外の専門家」が混ざり合い、新しいプロジェクトを生み出す実践型の合宿イベント。</a:t>
+              <a:t>地域を本気で良くしたい「地元の挑戦者」と、全国で活躍する「外の専門家」が混ざり合い、新しいプロジェクトを生み出す実践型のイベント。</a:t>
             </a:r>
             <a:endParaRPr lang="en-US" sz="2400" dirty="0"/>
           </a:p>
@@ -15671,7 +16438,7 @@
                 <a:ea typeface="Meiryo" pitchFamily="34" charset="-122"/>
                 <a:cs typeface="Meiryo" pitchFamily="34" charset="-120"/>
               </a:rPr>
-              <a:t>別府・旅館での「合宿型開催」が生む3つのメリット</a:t>
+              <a:t>「レンガホールでの原点回帰」と「事後合宿」の二段構え</a:t>
             </a:r>
             <a:endParaRPr lang="en-US" sz="3000" dirty="0"/>
           </a:p>
@@ -15710,7 +16477,7 @@
                 <a:ea typeface="Meiryo" pitchFamily="34" charset="-122"/>
                 <a:cs typeface="Meiryo" pitchFamily="34" charset="-120"/>
               </a:rPr>
-              <a:t>大規模ホールでの講演スタイルを捨て、数十名規模の旅館貸し切りによるリトリート型を採用する。</a:t>
+              <a:t>2027年1月23日（土）、会場は第0回と同じ別府レンガホール2階。付帯イベントを削ぎ落とし、本編と懇親会にリソースを全集中させる。</a:t>
             </a:r>
             <a:endParaRPr lang="en-US" sz="1250" dirty="0"/>
           </a:p>
@@ -15822,7 +16589,7 @@
                 <a:ea typeface="Meiryo" pitchFamily="34" charset="-122"/>
                 <a:cs typeface="Meiryo" pitchFamily="34" charset="-120"/>
               </a:rPr>
-              <a:t>運営コストの劇的な削減</a:t>
+              <a:t>本編＋懇親会に集中</a:t>
             </a:r>
             <a:endParaRPr lang="en-US" sz="1600" dirty="0"/>
           </a:p>
@@ -15864,7 +16631,7 @@
                 <a:ea typeface="Meiryo" pitchFamily="34" charset="-122"/>
                 <a:cs typeface="Meiryo" pitchFamily="34" charset="-120"/>
               </a:rPr>
-              <a:t>会場設営、移動手配、複数店舗での懇親会予約といったロジスティクスが「旅館という一つの閉鎖空間」に集約される。3名体制でも十分にコントロール可能。</a:t>
+              <a:t>ワーケーション、前夜祭、大人の遠足といった付帯イベントは今回一切行わない。第0回フォーマットへの原点回帰により、3名体制でも十分にコントロール可能。</a:t>
             </a:r>
             <a:endParaRPr lang="en-US" sz="1200" dirty="0"/>
           </a:p>
@@ -15976,7 +16743,7 @@
                 <a:ea typeface="Meiryo" pitchFamily="34" charset="-122"/>
                 <a:cs typeface="Meiryo" pitchFamily="34" charset="-120"/>
               </a:rPr>
-              <a:t>逃げ場のない濃密な対話</a:t>
+              <a:t>会場はレンガホール2階</a:t>
             </a:r>
             <a:endParaRPr lang="en-US" sz="1600" dirty="0"/>
           </a:p>
@@ -16018,7 +16785,7 @@
                 <a:ea typeface="Meiryo" pitchFamily="34" charset="-122"/>
                 <a:cs typeface="Meiryo" pitchFamily="34" charset="-120"/>
               </a:rPr>
-              <a:t>同じ屋根の下で寝食を共にし、深夜まで議論を交わし、翌朝一緒に温泉に入る。高知の「ワーケーションと本編の融合」を、わずか1泊2日のパッケージで実現できる。</a:t>
+              <a:t>B-biz LINKが入居する昭和初期建設の登録有形文化財。会場費を無料に抑えつつ、独特の非日常空間をそのまま活用できる。</a:t>
             </a:r>
             <a:endParaRPr lang="en-US" sz="1200" dirty="0"/>
           </a:p>
@@ -16130,7 +16897,7 @@
                 <a:ea typeface="Meiryo" pitchFamily="34" charset="-122"/>
                 <a:cs typeface="Meiryo" pitchFamily="34" charset="-120"/>
               </a:rPr>
-              <a:t>プレミアム感による単価向上</a:t>
+              <a:t>事後の少人数合宿</a:t>
             </a:r>
             <a:endParaRPr lang="en-US" sz="1600" dirty="0"/>
           </a:p>
@@ -16172,7 +16939,7 @@
                 <a:ea typeface="Meiryo" pitchFamily="34" charset="-122"/>
                 <a:cs typeface="Meiryo" pitchFamily="34" charset="-120"/>
               </a:rPr>
-              <a:t>小規模であることを「限定性」と位置づけ、参加費・協賛費の単価を上げる。少ない集客でも損益分岐点を超える強靭な財務モデルを構築できる。</a:t>
+              <a:t>「合宿」の要素は後日へ。参加者の中から次回運営に巻き込めそうな数名だけを対象に極少人数で実施し、次期コアメンバーとの強固な信頼関係を築く。</a:t>
             </a:r>
             <a:endParaRPr lang="en-US" sz="1200" dirty="0"/>
           </a:p>
